--- a/사주교육_2회차.pptx
+++ b/사주교육_2회차.pptx
@@ -9836,7 +9836,7 @@
         <p:spPr>
           <a:xfrm>
             <a:off x="1600200" y="2743200"/>
-            <a:ext cx="9829800" cy="324916.8"/>
+            <a:ext cx="9829800" cy="324917"/>
           </a:xfrm>
           <a:prstGeom prst="rect">
             <a:avLst/>
@@ -9995,7 +9995,7 @@
         <p:spPr>
           <a:xfrm>
             <a:off x="1600200" y="3444240"/>
-            <a:ext cx="9829800" cy="324916.8"/>
+            <a:ext cx="9829800" cy="324917"/>
           </a:xfrm>
           <a:prstGeom prst="rect">
             <a:avLst/>
@@ -10154,7 +10154,7 @@
         <p:spPr>
           <a:xfrm>
             <a:off x="1600200" y="4145280"/>
-            <a:ext cx="9829800" cy="324916.8"/>
+            <a:ext cx="9829800" cy="324917"/>
           </a:xfrm>
           <a:prstGeom prst="rect">
             <a:avLst/>
@@ -10313,7 +10313,7 @@
         <p:spPr>
           <a:xfrm>
             <a:off x="1600200" y="4846320"/>
-            <a:ext cx="9829800" cy="324916.8"/>
+            <a:ext cx="9829800" cy="324917"/>
           </a:xfrm>
           <a:prstGeom prst="rect">
             <a:avLst/>
@@ -10472,7 +10472,7 @@
         <p:spPr>
           <a:xfrm>
             <a:off x="1600200" y="5547360"/>
-            <a:ext cx="9829800" cy="324916.8"/>
+            <a:ext cx="9829800" cy="324917"/>
           </a:xfrm>
           <a:prstGeom prst="rect">
             <a:avLst/>
@@ -12478,7 +12478,7 @@
         <p:spPr>
           <a:xfrm>
             <a:off x="3200400" y="5425821"/>
-            <a:ext cx="2527300" cy="408622.50000000006"/>
+            <a:ext cx="2527300" cy="408623"/>
           </a:xfrm>
           <a:prstGeom prst="rect">
             <a:avLst/>
@@ -12581,7 +12581,7 @@
         <p:spPr>
           <a:xfrm>
             <a:off x="5880100" y="5425821"/>
-            <a:ext cx="2527300" cy="408622.50000000006"/>
+            <a:ext cx="2527300" cy="408623"/>
           </a:xfrm>
           <a:prstGeom prst="rect">
             <a:avLst/>
@@ -12684,7 +12684,7 @@
         <p:spPr>
           <a:xfrm>
             <a:off x="8559800" y="5425821"/>
-            <a:ext cx="2527300" cy="408622.50000000006"/>
+            <a:ext cx="2527300" cy="408623"/>
           </a:xfrm>
           <a:prstGeom prst="rect">
             <a:avLst/>
@@ -15042,7 +15042,7 @@
                 <a:ea typeface="Pretendard" pitchFamily="34" charset="-122"/>
                 <a:cs typeface="Pretendard" pitchFamily="34" charset="-120"/>
               </a:rPr>
-              <a:t>庚金 일간이 한겨울에 났다. 차갑게 굳은 금 → 따뜻한 火로 녹여야 빛난다. (필요오행 = 火)</a:t>
+              <a:t>庚金 일간이 한겨울에 났다. 차갑게 굳은 금을 따뜻한 火로 녹여야 빛난다. (필요오행은 火)</a:t>
             </a:r>
           </a:p>
         </p:txBody>
@@ -19361,7 +19361,7 @@
                 <a:ea typeface="Pretendard" pitchFamily="34" charset="-122"/>
                 <a:cs typeface="Pretendard" pitchFamily="34" charset="-120"/>
               </a:rPr>
-              <a:t>일간·강약·오행 균형을 먼저 본다.</a:t>
+              <a:t>일간·강약·오행 균형 확인</a:t>
             </a:r>
           </a:p>
         </p:txBody>
@@ -19534,7 +19534,7 @@
                 <a:ea typeface="Pretendard" pitchFamily="34" charset="-122"/>
                 <a:cs typeface="Pretendard" pitchFamily="34" charset="-120"/>
               </a:rPr>
-              <a:t>무엇이 필요하고 부담인지 (용신·기신).</a:t>
+              <a:t>필요/부담 가리기 (용신·기신)</a:t>
             </a:r>
           </a:p>
         </p:txBody>
@@ -19707,7 +19707,7 @@
                 <a:ea typeface="Pretendard" pitchFamily="34" charset="-122"/>
                 <a:cs typeface="Pretendard" pitchFamily="34" charset="-120"/>
               </a:rPr>
-              <a:t>대운·세운 간지의 오행을 넣어본다.</a:t>
+              <a:t>대운·세운 간지 오행을 대입</a:t>
             </a:r>
           </a:p>
         </p:txBody>
@@ -19880,7 +19880,7 @@
                 <a:ea typeface="Pretendard" pitchFamily="34" charset="-122"/>
                 <a:cs typeface="Pretendard" pitchFamily="34" charset="-120"/>
               </a:rPr>
-              <a:t>필요하면 순풍, 부담이면 역풍.</a:t>
+              <a:t>필요하면 순풍, 부담이면 역풍</a:t>
             </a:r>
           </a:p>
         </p:txBody>
@@ -20411,7 +20411,7 @@
         <p:spPr>
           <a:xfrm>
             <a:off x="1600200" y="2743200"/>
-            <a:ext cx="9829800" cy="324916.8"/>
+            <a:ext cx="9829800" cy="324917"/>
           </a:xfrm>
           <a:prstGeom prst="rect">
             <a:avLst/>
@@ -20570,7 +20570,7 @@
         <p:spPr>
           <a:xfrm>
             <a:off x="1600200" y="3444240"/>
-            <a:ext cx="9829800" cy="324916.8"/>
+            <a:ext cx="9829800" cy="324917"/>
           </a:xfrm>
           <a:prstGeom prst="rect">
             <a:avLst/>
@@ -20729,7 +20729,7 @@
         <p:spPr>
           <a:xfrm>
             <a:off x="1600200" y="4145280"/>
-            <a:ext cx="9829800" cy="324916.8"/>
+            <a:ext cx="9829800" cy="324917"/>
           </a:xfrm>
           <a:prstGeom prst="rect">
             <a:avLst/>
@@ -20888,7 +20888,7 @@
         <p:spPr>
           <a:xfrm>
             <a:off x="1600200" y="4846320"/>
-            <a:ext cx="9829800" cy="324916.8"/>
+            <a:ext cx="9829800" cy="324917"/>
           </a:xfrm>
           <a:prstGeom prst="rect">
             <a:avLst/>
@@ -21047,7 +21047,7 @@
         <p:spPr>
           <a:xfrm>
             <a:off x="1600200" y="5547360"/>
-            <a:ext cx="9829800" cy="324916.8"/>
+            <a:ext cx="9829800" cy="324917"/>
           </a:xfrm>
           <a:prstGeom prst="rect">
             <a:avLst/>
@@ -22495,7 +22495,7 @@
                 <a:ea typeface="paybooc OTF" pitchFamily="34" charset="-122"/>
                 <a:cs typeface="paybooc OTF" pitchFamily="34" charset="-120"/>
               </a:rPr>
-              <a:t>오늘 읽은 대운·세운 위에, “용신”으로 길흉을 더 정교하게</a:t>
+              <a:t>오늘 읽은 대운·세운 위에, 용신(用神)으로 길흉을 더 정교하게</a:t>
             </a:r>
           </a:p>
         </p:txBody>

--- a/사주교육_2회차.pptx
+++ b/사주교육_2회차.pptx
@@ -2572,7 +2572,7 @@
         </p:nvSpPr>
         <p:spPr>
           <a:xfrm>
-            <a:off x="762000" y="2705100"/>
+            <a:off x="762000" y="2662321"/>
             <a:ext cx="10668000" cy="723900"/>
           </a:xfrm>
           <a:prstGeom prst="roundRect">
@@ -2779,7 +2779,7 @@
         </p:nvSpPr>
         <p:spPr>
           <a:xfrm>
-            <a:off x="1905000" y="3790950"/>
+            <a:off x="1905000" y="3734678"/>
             <a:ext cx="9220200" cy="271780"/>
           </a:xfrm>
           <a:prstGeom prst="rect">
@@ -2952,7 +2952,7 @@
         </p:nvSpPr>
         <p:spPr>
           <a:xfrm>
-            <a:off x="1905000" y="4622800"/>
+            <a:off x="1905000" y="4566528"/>
             <a:ext cx="9220200" cy="271780"/>
           </a:xfrm>
           <a:prstGeom prst="rect">
@@ -2990,7 +2990,7 @@
         </p:nvSpPr>
         <p:spPr>
           <a:xfrm>
-            <a:off x="1905000" y="4744847"/>
+            <a:off x="1905000" y="4730779"/>
             <a:ext cx="9220200" cy="312547"/>
           </a:xfrm>
           <a:prstGeom prst="rect">
@@ -3125,7 +3125,7 @@
         </p:nvSpPr>
         <p:spPr>
           <a:xfrm>
-            <a:off x="1905000" y="5454650"/>
+            <a:off x="1905000" y="5398378"/>
             <a:ext cx="9220200" cy="271780"/>
           </a:xfrm>
           <a:prstGeom prst="rect">
@@ -3163,7 +3163,7 @@
         </p:nvSpPr>
         <p:spPr>
           <a:xfrm>
-            <a:off x="1905000" y="5576697"/>
+            <a:off x="1905000" y="5562629"/>
             <a:ext cx="9220200" cy="312547"/>
           </a:xfrm>
           <a:prstGeom prst="rect">
@@ -24207,8 +24207,8 @@
         </p:nvSpPr>
         <p:spPr>
           <a:xfrm>
-            <a:off x="762000" y="4191000"/>
-            <a:ext cx="8382000" cy="990600"/>
+            <a:off x="761999" y="4191000"/>
+            <a:ext cx="9352671" cy="990600"/>
           </a:xfrm>
           <a:prstGeom prst="rect">
             <a:avLst/>
@@ -25460,7 +25460,7 @@
         </p:nvSpPr>
         <p:spPr>
           <a:xfrm>
-            <a:off x="1047750" y="3028950"/>
+            <a:off x="1047750" y="2930478"/>
             <a:ext cx="685800" cy="685800"/>
           </a:xfrm>
           <a:prstGeom prst="ellipse">
@@ -25482,7 +25482,7 @@
         </p:nvSpPr>
         <p:spPr>
           <a:xfrm>
-            <a:off x="1047750" y="3028950"/>
+            <a:off x="1047750" y="2930478"/>
             <a:ext cx="685800" cy="685800"/>
           </a:xfrm>
           <a:prstGeom prst="rect">
@@ -25520,7 +25520,7 @@
         </p:nvSpPr>
         <p:spPr>
           <a:xfrm>
-            <a:off x="1047750" y="3867150"/>
+            <a:off x="1047750" y="3628003"/>
             <a:ext cx="4648200" cy="342900"/>
           </a:xfrm>
           <a:prstGeom prst="rect">
@@ -25558,7 +25558,7 @@
         </p:nvSpPr>
         <p:spPr>
           <a:xfrm>
-            <a:off x="1047750" y="4286250"/>
+            <a:off x="1047750" y="3976763"/>
             <a:ext cx="4648200" cy="381000"/>
           </a:xfrm>
           <a:prstGeom prst="rect">
@@ -25671,7 +25671,7 @@
         </p:nvSpPr>
         <p:spPr>
           <a:xfrm>
-            <a:off x="6496050" y="3028950"/>
+            <a:off x="6496050" y="2930478"/>
             <a:ext cx="685800" cy="685800"/>
           </a:xfrm>
           <a:prstGeom prst="ellipse">
@@ -25693,7 +25693,7 @@
         </p:nvSpPr>
         <p:spPr>
           <a:xfrm>
-            <a:off x="6496050" y="3028950"/>
+            <a:off x="6496050" y="2930474"/>
             <a:ext cx="685800" cy="685800"/>
           </a:xfrm>
           <a:prstGeom prst="rect">
@@ -25731,7 +25731,7 @@
         </p:nvSpPr>
         <p:spPr>
           <a:xfrm>
-            <a:off x="6496050" y="3867150"/>
+            <a:off x="6496050" y="3628003"/>
             <a:ext cx="4648200" cy="342900"/>
           </a:xfrm>
           <a:prstGeom prst="rect">
@@ -25769,7 +25769,7 @@
         </p:nvSpPr>
         <p:spPr>
           <a:xfrm>
-            <a:off x="6496050" y="4286250"/>
+            <a:off x="6496050" y="3976763"/>
             <a:ext cx="4648200" cy="381000"/>
           </a:xfrm>
           <a:prstGeom prst="rect">
@@ -26358,7 +26358,7 @@
         </p:nvSpPr>
         <p:spPr>
           <a:xfrm>
-            <a:off x="1047750" y="3028950"/>
+            <a:off x="1047750" y="2930476"/>
             <a:ext cx="685800" cy="685800"/>
           </a:xfrm>
           <a:prstGeom prst="ellipse">
@@ -26380,7 +26380,7 @@
         </p:nvSpPr>
         <p:spPr>
           <a:xfrm>
-            <a:off x="1047750" y="3028950"/>
+            <a:off x="1047750" y="2930476"/>
             <a:ext cx="685800" cy="685800"/>
           </a:xfrm>
           <a:prstGeom prst="rect">
@@ -26418,7 +26418,7 @@
         </p:nvSpPr>
         <p:spPr>
           <a:xfrm>
-            <a:off x="1047750" y="3867150"/>
+            <a:off x="1047750" y="3698336"/>
             <a:ext cx="4648200" cy="342900"/>
           </a:xfrm>
           <a:prstGeom prst="rect">
@@ -26456,7 +26456,7 @@
         </p:nvSpPr>
         <p:spPr>
           <a:xfrm>
-            <a:off x="1047750" y="4286250"/>
+            <a:off x="1047750" y="4117436"/>
             <a:ext cx="4648200" cy="381000"/>
           </a:xfrm>
           <a:prstGeom prst="rect">
@@ -26503,18 +26503,10 @@
                 <a:ea typeface="Pretendard" pitchFamily="34" charset="-122"/>
                 <a:cs typeface="Pretendard" pitchFamily="34" charset="-120"/>
               </a:rPr>
-              <a:t>제 실력을 못 낸다 — 무리하면 사고.</a:t>
-            </a:r>
-          </a:p>
-          <a:p>
-            <a:pPr marL="0" indent="0" algn="l">
-              <a:lnSpc>
-                <a:spcPct val="135000"/>
-              </a:lnSpc>
-              <a:buNone/>
-            </a:pPr>
-            <a:r>
-              <a:rPr lang="en-US" sz="1250" dirty="0">
+              <a:t>제 실력을 못 낸다 — 무리하면 </a:t>
+            </a:r>
+            <a:r>
+              <a:rPr lang="en-US" sz="1250" dirty="0" err="1">
                 <a:solidFill>
                   <a:srgbClr val="4E4E4E"/>
                 </a:solidFill>
@@ -26522,7 +26514,18 @@
                 <a:ea typeface="Pretendard" pitchFamily="34" charset="-122"/>
                 <a:cs typeface="Pretendard" pitchFamily="34" charset="-120"/>
               </a:rPr>
-              <a:t>→ 이런 때는 “지키는” 전략.</a:t>
+              <a:t>사고</a:t>
+            </a:r>
+            <a:r>
+              <a:rPr lang="en-US" sz="1250" dirty="0">
+                <a:solidFill>
+                  <a:srgbClr val="4E4E4E"/>
+                </a:solidFill>
+                <a:latin typeface="Pretendard" pitchFamily="34" charset="0"/>
+                <a:ea typeface="Pretendard" pitchFamily="34" charset="-122"/>
+                <a:cs typeface="Pretendard" pitchFamily="34" charset="-120"/>
+              </a:rPr>
+              <a:t>. → 이런 때는 “지키는” 전략.</a:t>
             </a:r>
           </a:p>
         </p:txBody>
@@ -26569,7 +26572,7 @@
         </p:nvSpPr>
         <p:spPr>
           <a:xfrm>
-            <a:off x="6496050" y="3028950"/>
+            <a:off x="6496050" y="2930476"/>
             <a:ext cx="685800" cy="685800"/>
           </a:xfrm>
           <a:prstGeom prst="ellipse">
@@ -26591,7 +26594,7 @@
         </p:nvSpPr>
         <p:spPr>
           <a:xfrm>
-            <a:off x="6496050" y="3028950"/>
+            <a:off x="6496050" y="2930476"/>
             <a:ext cx="685800" cy="685800"/>
           </a:xfrm>
           <a:prstGeom prst="rect">
@@ -26629,7 +26632,7 @@
         </p:nvSpPr>
         <p:spPr>
           <a:xfrm>
-            <a:off x="6496050" y="3867150"/>
+            <a:off x="6496050" y="3698336"/>
             <a:ext cx="4648200" cy="342900"/>
           </a:xfrm>
           <a:prstGeom prst="rect">
@@ -26667,7 +26670,7 @@
         </p:nvSpPr>
         <p:spPr>
           <a:xfrm>
-            <a:off x="6496050" y="4286250"/>
+            <a:off x="6496050" y="4117436"/>
             <a:ext cx="4648200" cy="381000"/>
           </a:xfrm>
           <a:prstGeom prst="rect">
@@ -26714,18 +26717,10 @@
                 <a:ea typeface="Pretendard" pitchFamily="34" charset="-122"/>
                 <a:cs typeface="Pretendard" pitchFamily="34" charset="-120"/>
               </a:rPr>
-              <a:t>거침없이 뻗어 나간다.</a:t>
-            </a:r>
-          </a:p>
-          <a:p>
-            <a:pPr marL="0" indent="0" algn="l">
-              <a:lnSpc>
-                <a:spcPct val="135000"/>
-              </a:lnSpc>
-              <a:buNone/>
-            </a:pPr>
-            <a:r>
-              <a:rPr lang="en-US" sz="1250" dirty="0">
+              <a:t>거침없이 뻗어 </a:t>
+            </a:r>
+            <a:r>
+              <a:rPr lang="en-US" sz="1250" dirty="0" err="1">
                 <a:solidFill>
                   <a:srgbClr val="4E4E4E"/>
                 </a:solidFill>
@@ -26733,7 +26728,18 @@
                 <a:ea typeface="Pretendard" pitchFamily="34" charset="-122"/>
                 <a:cs typeface="Pretendard" pitchFamily="34" charset="-120"/>
               </a:rPr>
-              <a:t>→ 이런 때는 “나아가는” 전략.</a:t>
+              <a:t>나간다</a:t>
+            </a:r>
+            <a:r>
+              <a:rPr lang="en-US" sz="1250" dirty="0">
+                <a:solidFill>
+                  <a:srgbClr val="4E4E4E"/>
+                </a:solidFill>
+                <a:latin typeface="Pretendard" pitchFamily="34" charset="0"/>
+                <a:ea typeface="Pretendard" pitchFamily="34" charset="-122"/>
+                <a:cs typeface="Pretendard" pitchFamily="34" charset="-120"/>
+              </a:rPr>
+              <a:t>. → 이런 때는 “나아가는” 전략.</a:t>
             </a:r>
           </a:p>
         </p:txBody>
@@ -27256,7 +27262,7 @@
         </p:nvSpPr>
         <p:spPr>
           <a:xfrm>
-            <a:off x="762000" y="3048000"/>
+            <a:off x="762000" y="3188680"/>
             <a:ext cx="3289300" cy="190500"/>
           </a:xfrm>
           <a:prstGeom prst="rect">
@@ -27294,7 +27300,7 @@
         </p:nvSpPr>
         <p:spPr>
           <a:xfrm>
-            <a:off x="762000" y="3257550"/>
+            <a:off x="762000" y="3398230"/>
             <a:ext cx="3289300" cy="495300"/>
           </a:xfrm>
           <a:prstGeom prst="rect">
@@ -27332,7 +27338,7 @@
         </p:nvSpPr>
         <p:spPr>
           <a:xfrm>
-            <a:off x="762000" y="3790950"/>
+            <a:off x="762000" y="3931630"/>
             <a:ext cx="3289300" cy="285750"/>
           </a:xfrm>
           <a:prstGeom prst="rect">
@@ -27445,7 +27451,7 @@
         </p:nvSpPr>
         <p:spPr>
           <a:xfrm>
-            <a:off x="4451350" y="3048000"/>
+            <a:off x="4451350" y="3188680"/>
             <a:ext cx="3289300" cy="190500"/>
           </a:xfrm>
           <a:prstGeom prst="rect">
@@ -27483,7 +27489,7 @@
         </p:nvSpPr>
         <p:spPr>
           <a:xfrm>
-            <a:off x="4451350" y="3257550"/>
+            <a:off x="4451350" y="3398230"/>
             <a:ext cx="3289300" cy="495300"/>
           </a:xfrm>
           <a:prstGeom prst="rect">
@@ -27521,7 +27527,7 @@
         </p:nvSpPr>
         <p:spPr>
           <a:xfrm>
-            <a:off x="4451350" y="3790950"/>
+            <a:off x="4451350" y="3931630"/>
             <a:ext cx="3289300" cy="285750"/>
           </a:xfrm>
           <a:prstGeom prst="rect">
@@ -27634,7 +27640,7 @@
         </p:nvSpPr>
         <p:spPr>
           <a:xfrm>
-            <a:off x="8140700" y="3048000"/>
+            <a:off x="8140700" y="3188680"/>
             <a:ext cx="3289300" cy="190500"/>
           </a:xfrm>
           <a:prstGeom prst="rect">
@@ -27672,7 +27678,7 @@
         </p:nvSpPr>
         <p:spPr>
           <a:xfrm>
-            <a:off x="8140700" y="3257550"/>
+            <a:off x="8140700" y="3398230"/>
             <a:ext cx="3289300" cy="495300"/>
           </a:xfrm>
           <a:prstGeom prst="rect">
@@ -27710,7 +27716,7 @@
         </p:nvSpPr>
         <p:spPr>
           <a:xfrm>
-            <a:off x="8140700" y="3790950"/>
+            <a:off x="8140700" y="3931630"/>
             <a:ext cx="3289300" cy="285750"/>
           </a:xfrm>
           <a:prstGeom prst="rect">

--- a/사주교육_2회차.pptx
+++ b/사주교육_2회차.pptx
@@ -698,9 +698,9 @@
                 <a:solidFill>
                   <a:srgbClr val="FFFFFF"/>
                 </a:solidFill>
-                <a:latin typeface="paybooc OTF" pitchFamily="34" charset="0"/>
-                <a:ea typeface="paybooc OTF" pitchFamily="34" charset="-122"/>
-                <a:cs typeface="paybooc OTF" pitchFamily="34" charset="-120"/>
+                <a:latin typeface="Pretendard Light" pitchFamily="34" charset="0"/>
+                <a:ea typeface="Pretendard Light" pitchFamily="34" charset="-122"/>
+                <a:cs typeface="Pretendard Light" pitchFamily="34" charset="-120"/>
               </a:rPr>
               <a:t>수수 사주교육</a:t>
             </a:r>
@@ -736,9 +736,9 @@
                 <a:solidFill>
                   <a:srgbClr val="A7E5D3"/>
                 </a:solidFill>
-                <a:latin typeface="paybooc OTF" pitchFamily="34" charset="0"/>
-                <a:ea typeface="paybooc OTF" pitchFamily="34" charset="-122"/>
-                <a:cs typeface="paybooc OTF" pitchFamily="34" charset="-120"/>
+                <a:latin typeface="Pretendard Light" pitchFamily="34" charset="0"/>
+                <a:ea typeface="Pretendard Light" pitchFamily="34" charset="-122"/>
+                <a:cs typeface="Pretendard Light" pitchFamily="34" charset="-120"/>
               </a:rPr>
               <a:t>SAJU TEACHER COURSE · SESSION 02</a:t>
             </a:r>
@@ -834,9 +834,9 @@
                 <a:solidFill>
                   <a:srgbClr val="A8A29E"/>
                 </a:solidFill>
-                <a:latin typeface="paybooc OTF" pitchFamily="34" charset="0"/>
-                <a:ea typeface="paybooc OTF" pitchFamily="34" charset="-122"/>
-                <a:cs typeface="paybooc OTF" pitchFamily="34" charset="-120"/>
+                <a:latin typeface="Pretendard Light" pitchFamily="34" charset="0"/>
+                <a:ea typeface="Pretendard Light" pitchFamily="34" charset="-122"/>
+                <a:cs typeface="Pretendard Light" pitchFamily="34" charset="-120"/>
               </a:rPr>
               <a:t>운(運)은 사주라는 자동차가 달리는 길이다</a:t>
             </a:r>
@@ -894,9 +894,9 @@
                 <a:solidFill>
                   <a:srgbClr val="FFFFFF"/>
                 </a:solidFill>
-                <a:latin typeface="paybooc OTF" pitchFamily="34" charset="0"/>
-                <a:ea typeface="paybooc OTF" pitchFamily="34" charset="-122"/>
-                <a:cs typeface="paybooc OTF" pitchFamily="34" charset="-120"/>
+                <a:latin typeface="Pretendard Light" pitchFamily="34" charset="0"/>
+                <a:ea typeface="Pretendard Light" pitchFamily="34" charset="-122"/>
+                <a:cs typeface="Pretendard Light" pitchFamily="34" charset="-120"/>
               </a:rPr>
               <a:t>2회차 · 대운·세운 읽는 법</a:t>
             </a:r>
@@ -1108,9 +1108,9 @@
                 <a:solidFill>
                   <a:srgbClr val="0C0A09"/>
                 </a:solidFill>
-                <a:latin typeface="paybooc OTF" pitchFamily="34" charset="0"/>
-                <a:ea typeface="paybooc OTF" pitchFamily="34" charset="-122"/>
-                <a:cs typeface="paybooc OTF" pitchFamily="34" charset="-120"/>
+                <a:latin typeface="Pretendard Light" pitchFamily="34" charset="0"/>
+                <a:ea typeface="Pretendard Light" pitchFamily="34" charset="-122"/>
+                <a:cs typeface="Pretendard Light" pitchFamily="34" charset="-120"/>
               </a:rPr>
               <a:t>수수 사주교육</a:t>
             </a:r>
@@ -1146,9 +1146,9 @@
                 <a:solidFill>
                   <a:srgbClr val="777169"/>
                 </a:solidFill>
-                <a:latin typeface="paybooc OTF" pitchFamily="34" charset="0"/>
-                <a:ea typeface="paybooc OTF" pitchFamily="34" charset="-122"/>
-                <a:cs typeface="paybooc OTF" pitchFamily="34" charset="-120"/>
+                <a:latin typeface="Pretendard Light" pitchFamily="34" charset="0"/>
+                <a:ea typeface="Pretendard Light" pitchFamily="34" charset="-122"/>
+                <a:cs typeface="Pretendard Light" pitchFamily="34" charset="-120"/>
               </a:rPr>
               <a:t>SECTION 02</a:t>
             </a:r>
@@ -1184,9 +1184,9 @@
                 <a:solidFill>
                   <a:srgbClr val="777169"/>
                 </a:solidFill>
-                <a:latin typeface="paybooc OTF" pitchFamily="34" charset="0"/>
-                <a:ea typeface="paybooc OTF" pitchFamily="34" charset="-122"/>
-                <a:cs typeface="paybooc OTF" pitchFamily="34" charset="-120"/>
+                <a:latin typeface="Pretendard Light" pitchFamily="34" charset="0"/>
+                <a:ea typeface="Pretendard Light" pitchFamily="34" charset="-122"/>
+                <a:cs typeface="Pretendard Light" pitchFamily="34" charset="-120"/>
               </a:rPr>
               <a:t>SECTION 02</a:t>
             </a:r>
@@ -1260,9 +1260,9 @@
                 <a:solidFill>
                   <a:srgbClr val="A8A29E"/>
                 </a:solidFill>
-                <a:latin typeface="paybooc OTF" pitchFamily="34" charset="0"/>
-                <a:ea typeface="paybooc OTF" pitchFamily="34" charset="-122"/>
-                <a:cs typeface="paybooc OTF" pitchFamily="34" charset="-120"/>
+                <a:latin typeface="Pretendard Light" pitchFamily="34" charset="0"/>
+                <a:ea typeface="Pretendard Light" pitchFamily="34" charset="-122"/>
+                <a:cs typeface="Pretendard Light" pitchFamily="34" charset="-120"/>
               </a:rPr>
               <a:t>THE TEN-YEAR CYCLE</a:t>
             </a:r>
@@ -1493,9 +1493,9 @@
                 <a:solidFill>
                   <a:srgbClr val="0C0A09"/>
                 </a:solidFill>
-                <a:latin typeface="paybooc OTF" pitchFamily="34" charset="0"/>
-                <a:ea typeface="paybooc OTF" pitchFamily="34" charset="-122"/>
-                <a:cs typeface="paybooc OTF" pitchFamily="34" charset="-120"/>
+                <a:latin typeface="Pretendard Light" pitchFamily="34" charset="0"/>
+                <a:ea typeface="Pretendard Light" pitchFamily="34" charset="-122"/>
+                <a:cs typeface="Pretendard Light" pitchFamily="34" charset="-120"/>
               </a:rPr>
               <a:t>수수 사주교육</a:t>
             </a:r>
@@ -1531,9 +1531,9 @@
                 <a:solidFill>
                   <a:srgbClr val="777169"/>
                 </a:solidFill>
-                <a:latin typeface="paybooc OTF" pitchFamily="34" charset="0"/>
-                <a:ea typeface="paybooc OTF" pitchFamily="34" charset="-122"/>
-                <a:cs typeface="paybooc OTF" pitchFamily="34" charset="-120"/>
+                <a:latin typeface="Pretendard Light" pitchFamily="34" charset="0"/>
+                <a:ea typeface="Pretendard Light" pitchFamily="34" charset="-122"/>
+                <a:cs typeface="Pretendard Light" pitchFamily="34" charset="-120"/>
               </a:rPr>
               <a:t>02</a:t>
             </a:r>
@@ -1569,9 +1569,9 @@
                 <a:solidFill>
                   <a:srgbClr val="777169"/>
                 </a:solidFill>
-                <a:latin typeface="paybooc OTF" pitchFamily="34" charset="0"/>
-                <a:ea typeface="paybooc OTF" pitchFamily="34" charset="-122"/>
-                <a:cs typeface="paybooc OTF" pitchFamily="34" charset="-120"/>
+                <a:latin typeface="Pretendard Light" pitchFamily="34" charset="0"/>
+                <a:ea typeface="Pretendard Light" pitchFamily="34" charset="-122"/>
+                <a:cs typeface="Pretendard Light" pitchFamily="34" charset="-120"/>
               </a:rPr>
               <a:t>02 · 대운(大運)</a:t>
             </a:r>
@@ -1645,9 +1645,9 @@
                 <a:solidFill>
                   <a:srgbClr val="777169"/>
                 </a:solidFill>
-                <a:latin typeface="paybooc OTF" pitchFamily="34" charset="0"/>
-                <a:ea typeface="paybooc OTF" pitchFamily="34" charset="-122"/>
-                <a:cs typeface="paybooc OTF" pitchFamily="34" charset="-120"/>
+                <a:latin typeface="Pretendard Light" pitchFamily="34" charset="0"/>
+                <a:ea typeface="Pretendard Light" pitchFamily="34" charset="-122"/>
+                <a:cs typeface="Pretendard Light" pitchFamily="34" charset="-120"/>
               </a:rPr>
               <a:t>10년마다 바뀌는 삶의 큰 배경</a:t>
             </a:r>
@@ -1717,9 +1717,9 @@
                 <a:solidFill>
                   <a:srgbClr val="777169"/>
                 </a:solidFill>
-                <a:latin typeface="paybooc OTF" pitchFamily="34" charset="0"/>
-                <a:ea typeface="paybooc OTF" pitchFamily="34" charset="-122"/>
-                <a:cs typeface="paybooc OTF" pitchFamily="34" charset="-120"/>
+                <a:latin typeface="Pretendard Light" pitchFamily="34" charset="0"/>
+                <a:ea typeface="Pretendard Light" pitchFamily="34" charset="-122"/>
+                <a:cs typeface="Pretendard Light" pitchFamily="34" charset="-120"/>
               </a:rPr>
               <a:t>주기</a:t>
             </a:r>
@@ -1755,9 +1755,9 @@
                 <a:solidFill>
                   <a:srgbClr val="0C0A09"/>
                 </a:solidFill>
-                <a:latin typeface="paybooc OTF" pitchFamily="34" charset="0"/>
-                <a:ea typeface="paybooc OTF" pitchFamily="34" charset="-122"/>
-                <a:cs typeface="paybooc OTF" pitchFamily="34" charset="-120"/>
+                <a:latin typeface="Pretendard Light" pitchFamily="34" charset="0"/>
+                <a:ea typeface="Pretendard Light" pitchFamily="34" charset="-122"/>
+                <a:cs typeface="Pretendard Light" pitchFamily="34" charset="-120"/>
               </a:rPr>
               <a:t>10년 단위</a:t>
             </a:r>
@@ -1868,9 +1868,9 @@
                 <a:solidFill>
                   <a:srgbClr val="777169"/>
                 </a:solidFill>
-                <a:latin typeface="paybooc OTF" pitchFamily="34" charset="0"/>
-                <a:ea typeface="paybooc OTF" pitchFamily="34" charset="-122"/>
-                <a:cs typeface="paybooc OTF" pitchFamily="34" charset="-120"/>
+                <a:latin typeface="Pretendard Light" pitchFamily="34" charset="0"/>
+                <a:ea typeface="Pretendard Light" pitchFamily="34" charset="-122"/>
+                <a:cs typeface="Pretendard Light" pitchFamily="34" charset="-120"/>
               </a:rPr>
               <a:t>성격</a:t>
             </a:r>
@@ -1906,9 +1906,9 @@
                 <a:solidFill>
                   <a:srgbClr val="0C0A09"/>
                 </a:solidFill>
-                <a:latin typeface="paybooc OTF" pitchFamily="34" charset="0"/>
-                <a:ea typeface="paybooc OTF" pitchFamily="34" charset="-122"/>
-                <a:cs typeface="paybooc OTF" pitchFamily="34" charset="-120"/>
+                <a:latin typeface="Pretendard Light" pitchFamily="34" charset="0"/>
+                <a:ea typeface="Pretendard Light" pitchFamily="34" charset="-122"/>
+                <a:cs typeface="Pretendard Light" pitchFamily="34" charset="-120"/>
               </a:rPr>
               <a:t>큰 줄기</a:t>
             </a:r>
@@ -2019,9 +2019,9 @@
                 <a:solidFill>
                   <a:srgbClr val="777169"/>
                 </a:solidFill>
-                <a:latin typeface="paybooc OTF" pitchFamily="34" charset="0"/>
-                <a:ea typeface="paybooc OTF" pitchFamily="34" charset="-122"/>
-                <a:cs typeface="paybooc OTF" pitchFamily="34" charset="-120"/>
+                <a:latin typeface="Pretendard Light" pitchFamily="34" charset="0"/>
+                <a:ea typeface="Pretendard Light" pitchFamily="34" charset="-122"/>
+                <a:cs typeface="Pretendard Light" pitchFamily="34" charset="-120"/>
               </a:rPr>
               <a:t>범위</a:t>
             </a:r>
@@ -2057,9 +2057,9 @@
                 <a:solidFill>
                   <a:srgbClr val="0C0A09"/>
                 </a:solidFill>
-                <a:latin typeface="paybooc OTF" pitchFamily="34" charset="0"/>
-                <a:ea typeface="paybooc OTF" pitchFamily="34" charset="-122"/>
-                <a:cs typeface="paybooc OTF" pitchFamily="34" charset="-120"/>
+                <a:latin typeface="Pretendard Light" pitchFamily="34" charset="0"/>
+                <a:ea typeface="Pretendard Light" pitchFamily="34" charset="-122"/>
+                <a:cs typeface="Pretendard Light" pitchFamily="34" charset="-120"/>
               </a:rPr>
               <a:t>배경 전체</a:t>
             </a:r>
@@ -2170,9 +2170,9 @@
                 <a:solidFill>
                   <a:srgbClr val="DC2626"/>
                 </a:solidFill>
-                <a:latin typeface="paybooc OTF" pitchFamily="34" charset="0"/>
-                <a:ea typeface="paybooc OTF" pitchFamily="34" charset="-122"/>
-                <a:cs typeface="paybooc OTF" pitchFamily="34" charset="-120"/>
+                <a:latin typeface="Pretendard Light" pitchFamily="34" charset="0"/>
+                <a:ea typeface="Pretendard Light" pitchFamily="34" charset="-122"/>
+                <a:cs typeface="Pretendard Light" pitchFamily="34" charset="-120"/>
               </a:rPr>
               <a:t>오해 주의</a:t>
             </a:r>
@@ -2403,9 +2403,9 @@
                 <a:solidFill>
                   <a:srgbClr val="0C0A09"/>
                 </a:solidFill>
-                <a:latin typeface="paybooc OTF" pitchFamily="34" charset="0"/>
-                <a:ea typeface="paybooc OTF" pitchFamily="34" charset="-122"/>
-                <a:cs typeface="paybooc OTF" pitchFamily="34" charset="-120"/>
+                <a:latin typeface="Pretendard Light" pitchFamily="34" charset="0"/>
+                <a:ea typeface="Pretendard Light" pitchFamily="34" charset="-122"/>
+                <a:cs typeface="Pretendard Light" pitchFamily="34" charset="-120"/>
               </a:rPr>
               <a:t>수수 사주교육</a:t>
             </a:r>
@@ -2441,9 +2441,9 @@
                 <a:solidFill>
                   <a:srgbClr val="777169"/>
                 </a:solidFill>
-                <a:latin typeface="paybooc OTF" pitchFamily="34" charset="0"/>
-                <a:ea typeface="paybooc OTF" pitchFamily="34" charset="-122"/>
-                <a:cs typeface="paybooc OTF" pitchFamily="34" charset="-120"/>
+                <a:latin typeface="Pretendard Light" pitchFamily="34" charset="0"/>
+                <a:ea typeface="Pretendard Light" pitchFamily="34" charset="-122"/>
+                <a:cs typeface="Pretendard Light" pitchFamily="34" charset="-120"/>
               </a:rPr>
               <a:t>02</a:t>
             </a:r>
@@ -2479,9 +2479,9 @@
                 <a:solidFill>
                   <a:srgbClr val="777169"/>
                 </a:solidFill>
-                <a:latin typeface="paybooc OTF" pitchFamily="34" charset="0"/>
-                <a:ea typeface="paybooc OTF" pitchFamily="34" charset="-122"/>
-                <a:cs typeface="paybooc OTF" pitchFamily="34" charset="-120"/>
+                <a:latin typeface="Pretendard Light" pitchFamily="34" charset="0"/>
+                <a:ea typeface="Pretendard Light" pitchFamily="34" charset="-122"/>
+                <a:cs typeface="Pretendard Light" pitchFamily="34" charset="-120"/>
               </a:rPr>
               <a:t>02 · 대운(大運)</a:t>
             </a:r>
@@ -2555,9 +2555,9 @@
                 <a:solidFill>
                   <a:srgbClr val="777169"/>
                 </a:solidFill>
-                <a:latin typeface="paybooc OTF" pitchFamily="34" charset="0"/>
-                <a:ea typeface="paybooc OTF" pitchFamily="34" charset="-122"/>
-                <a:cs typeface="paybooc OTF" pitchFamily="34" charset="-120"/>
+                <a:latin typeface="Pretendard Light" pitchFamily="34" charset="0"/>
+                <a:ea typeface="Pretendard Light" pitchFamily="34" charset="-122"/>
+                <a:cs typeface="Pretendard Light" pitchFamily="34" charset="-120"/>
               </a:rPr>
               <a:t>첫 대운이 몇 살에 시작되나</a:t>
             </a:r>
@@ -2627,9 +2627,9 @@
                 <a:solidFill>
                   <a:srgbClr val="777169"/>
                 </a:solidFill>
-                <a:latin typeface="paybooc OTF" pitchFamily="34" charset="0"/>
-                <a:ea typeface="paybooc OTF" pitchFamily="34" charset="-122"/>
-                <a:cs typeface="paybooc OTF" pitchFamily="34" charset="-120"/>
+                <a:latin typeface="Pretendard Light" pitchFamily="34" charset="0"/>
+                <a:ea typeface="Pretendard Light" pitchFamily="34" charset="-122"/>
+                <a:cs typeface="Pretendard Light" pitchFamily="34" charset="-120"/>
               </a:rPr>
               <a:t>대운수란</a:t>
             </a:r>
@@ -2800,9 +2800,9 @@
                 <a:solidFill>
                   <a:srgbClr val="0C0A09"/>
                 </a:solidFill>
-                <a:latin typeface="paybooc OTF" pitchFamily="34" charset="0"/>
-                <a:ea typeface="paybooc OTF" pitchFamily="34" charset="-122"/>
-                <a:cs typeface="paybooc OTF" pitchFamily="34" charset="-120"/>
+                <a:latin typeface="Pretendard Light" pitchFamily="34" charset="0"/>
+                <a:ea typeface="Pretendard Light" pitchFamily="34" charset="-122"/>
+                <a:cs typeface="Pretendard Light" pitchFamily="34" charset="-120"/>
               </a:rPr>
               <a:t>태어난 날 → 가까운 절기까지 날짜를 센다</a:t>
             </a:r>
@@ -2973,9 +2973,9 @@
                 <a:solidFill>
                   <a:srgbClr val="0C0A09"/>
                 </a:solidFill>
-                <a:latin typeface="paybooc OTF" pitchFamily="34" charset="0"/>
-                <a:ea typeface="paybooc OTF" pitchFamily="34" charset="-122"/>
-                <a:cs typeface="paybooc OTF" pitchFamily="34" charset="-120"/>
+                <a:latin typeface="Pretendard Light" pitchFamily="34" charset="0"/>
+                <a:ea typeface="Pretendard Light" pitchFamily="34" charset="-122"/>
+                <a:cs typeface="Pretendard Light" pitchFamily="34" charset="-120"/>
               </a:rPr>
               <a:t>그 일수를 3으로 나눈다</a:t>
             </a:r>
@@ -3146,9 +3146,9 @@
                 <a:solidFill>
                   <a:srgbClr val="0C0A09"/>
                 </a:solidFill>
-                <a:latin typeface="paybooc OTF" pitchFamily="34" charset="0"/>
-                <a:ea typeface="paybooc OTF" pitchFamily="34" charset="-122"/>
-                <a:cs typeface="paybooc OTF" pitchFamily="34" charset="-120"/>
+                <a:latin typeface="Pretendard Light" pitchFamily="34" charset="0"/>
+                <a:ea typeface="Pretendard Light" pitchFamily="34" charset="-122"/>
+                <a:cs typeface="Pretendard Light" pitchFamily="34" charset="-120"/>
               </a:rPr>
               <a:t>그 나이부터 10년 주기로 진행</a:t>
             </a:r>
@@ -3417,9 +3417,9 @@
                 <a:solidFill>
                   <a:srgbClr val="0C0A09"/>
                 </a:solidFill>
-                <a:latin typeface="paybooc OTF" pitchFamily="34" charset="0"/>
-                <a:ea typeface="paybooc OTF" pitchFamily="34" charset="-122"/>
-                <a:cs typeface="paybooc OTF" pitchFamily="34" charset="-120"/>
+                <a:latin typeface="Pretendard Light" pitchFamily="34" charset="0"/>
+                <a:ea typeface="Pretendard Light" pitchFamily="34" charset="-122"/>
+                <a:cs typeface="Pretendard Light" pitchFamily="34" charset="-120"/>
               </a:rPr>
               <a:t>수수 사주교육</a:t>
             </a:r>
@@ -3455,9 +3455,9 @@
                 <a:solidFill>
                   <a:srgbClr val="777169"/>
                 </a:solidFill>
-                <a:latin typeface="paybooc OTF" pitchFamily="34" charset="0"/>
-                <a:ea typeface="paybooc OTF" pitchFamily="34" charset="-122"/>
-                <a:cs typeface="paybooc OTF" pitchFamily="34" charset="-120"/>
+                <a:latin typeface="Pretendard Light" pitchFamily="34" charset="0"/>
+                <a:ea typeface="Pretendard Light" pitchFamily="34" charset="-122"/>
+                <a:cs typeface="Pretendard Light" pitchFamily="34" charset="-120"/>
               </a:rPr>
               <a:t>02</a:t>
             </a:r>
@@ -3493,9 +3493,9 @@
                 <a:solidFill>
                   <a:srgbClr val="777169"/>
                 </a:solidFill>
-                <a:latin typeface="paybooc OTF" pitchFamily="34" charset="0"/>
-                <a:ea typeface="paybooc OTF" pitchFamily="34" charset="-122"/>
-                <a:cs typeface="paybooc OTF" pitchFamily="34" charset="-120"/>
+                <a:latin typeface="Pretendard Light" pitchFamily="34" charset="0"/>
+                <a:ea typeface="Pretendard Light" pitchFamily="34" charset="-122"/>
+                <a:cs typeface="Pretendard Light" pitchFamily="34" charset="-120"/>
               </a:rPr>
               <a:t>02 · 대운(大運)</a:t>
             </a:r>
@@ -3569,9 +3569,9 @@
                 <a:solidFill>
                   <a:srgbClr val="777169"/>
                 </a:solidFill>
-                <a:latin typeface="paybooc OTF" pitchFamily="34" charset="0"/>
-                <a:ea typeface="paybooc OTF" pitchFamily="34" charset="-122"/>
-                <a:cs typeface="paybooc OTF" pitchFamily="34" charset="-120"/>
+                <a:latin typeface="Pretendard Light" pitchFamily="34" charset="0"/>
+                <a:ea typeface="Pretendard Light" pitchFamily="34" charset="-122"/>
+                <a:cs typeface="Pretendard Light" pitchFamily="34" charset="-120"/>
               </a:rPr>
               <a:t>대운이 나아가는 방향</a:t>
             </a:r>
@@ -3663,9 +3663,9 @@
                 <a:solidFill>
                   <a:srgbClr val="777169"/>
                 </a:solidFill>
-                <a:latin typeface="paybooc OTF" pitchFamily="34" charset="0"/>
-                <a:ea typeface="paybooc OTF" pitchFamily="34" charset="-122"/>
-                <a:cs typeface="paybooc OTF" pitchFamily="34" charset="-120"/>
+                <a:latin typeface="Pretendard Light" pitchFamily="34" charset="0"/>
+                <a:ea typeface="Pretendard Light" pitchFamily="34" charset="-122"/>
+                <a:cs typeface="Pretendard Light" pitchFamily="34" charset="-120"/>
               </a:rPr>
               <a:t>順行 · 순행</a:t>
             </a:r>
@@ -3701,9 +3701,9 @@
                 <a:solidFill>
                   <a:srgbClr val="0C0A09"/>
                 </a:solidFill>
-                <a:latin typeface="paybooc OTF" pitchFamily="34" charset="0"/>
-                <a:ea typeface="paybooc OTF" pitchFamily="34" charset="-122"/>
-                <a:cs typeface="paybooc OTF" pitchFamily="34" charset="-120"/>
+                <a:latin typeface="Pretendard Light" pitchFamily="34" charset="0"/>
+                <a:ea typeface="Pretendard Light" pitchFamily="34" charset="-122"/>
+                <a:cs typeface="Pretendard Light" pitchFamily="34" charset="-120"/>
               </a:rPr>
               <a:t>간지가 앞으로</a:t>
             </a:r>
@@ -3897,9 +3897,9 @@
                 <a:solidFill>
                   <a:srgbClr val="777169"/>
                 </a:solidFill>
-                <a:latin typeface="paybooc OTF" pitchFamily="34" charset="0"/>
-                <a:ea typeface="paybooc OTF" pitchFamily="34" charset="-122"/>
-                <a:cs typeface="paybooc OTF" pitchFamily="34" charset="-120"/>
+                <a:latin typeface="Pretendard Light" pitchFamily="34" charset="0"/>
+                <a:ea typeface="Pretendard Light" pitchFamily="34" charset="-122"/>
+                <a:cs typeface="Pretendard Light" pitchFamily="34" charset="-120"/>
               </a:rPr>
               <a:t>逆行 · 역행</a:t>
             </a:r>
@@ -3935,9 +3935,9 @@
                 <a:solidFill>
                   <a:srgbClr val="0C0A09"/>
                 </a:solidFill>
-                <a:latin typeface="paybooc OTF" pitchFamily="34" charset="0"/>
-                <a:ea typeface="paybooc OTF" pitchFamily="34" charset="-122"/>
-                <a:cs typeface="paybooc OTF" pitchFamily="34" charset="-120"/>
+                <a:latin typeface="Pretendard Light" pitchFamily="34" charset="0"/>
+                <a:ea typeface="Pretendard Light" pitchFamily="34" charset="-122"/>
+                <a:cs typeface="Pretendard Light" pitchFamily="34" charset="-120"/>
               </a:rPr>
               <a:t>간지가 거꾸로</a:t>
             </a:r>
@@ -4109,9 +4109,9 @@
                 <a:solidFill>
                   <a:srgbClr val="777169"/>
                 </a:solidFill>
-                <a:latin typeface="paybooc OTF" pitchFamily="34" charset="0"/>
-                <a:ea typeface="paybooc OTF" pitchFamily="34" charset="-122"/>
-                <a:cs typeface="paybooc OTF" pitchFamily="34" charset="-120"/>
+                <a:latin typeface="Pretendard Light" pitchFamily="34" charset="0"/>
+                <a:ea typeface="Pretendard Light" pitchFamily="34" charset="-122"/>
+                <a:cs typeface="Pretendard Light" pitchFamily="34" charset="-120"/>
               </a:rPr>
               <a:t>판별법</a:t>
             </a:r>
@@ -4342,9 +4342,9 @@
                 <a:solidFill>
                   <a:srgbClr val="0C0A09"/>
                 </a:solidFill>
-                <a:latin typeface="paybooc OTF" pitchFamily="34" charset="0"/>
-                <a:ea typeface="paybooc OTF" pitchFamily="34" charset="-122"/>
-                <a:cs typeface="paybooc OTF" pitchFamily="34" charset="-120"/>
+                <a:latin typeface="Pretendard Light" pitchFamily="34" charset="0"/>
+                <a:ea typeface="Pretendard Light" pitchFamily="34" charset="-122"/>
+                <a:cs typeface="Pretendard Light" pitchFamily="34" charset="-120"/>
               </a:rPr>
               <a:t>수수 사주교육</a:t>
             </a:r>
@@ -4380,9 +4380,9 @@
                 <a:solidFill>
                   <a:srgbClr val="777169"/>
                 </a:solidFill>
-                <a:latin typeface="paybooc OTF" pitchFamily="34" charset="0"/>
-                <a:ea typeface="paybooc OTF" pitchFamily="34" charset="-122"/>
-                <a:cs typeface="paybooc OTF" pitchFamily="34" charset="-120"/>
+                <a:latin typeface="Pretendard Light" pitchFamily="34" charset="0"/>
+                <a:ea typeface="Pretendard Light" pitchFamily="34" charset="-122"/>
+                <a:cs typeface="Pretendard Light" pitchFamily="34" charset="-120"/>
               </a:rPr>
               <a:t>02</a:t>
             </a:r>
@@ -4418,9 +4418,9 @@
                 <a:solidFill>
                   <a:srgbClr val="777169"/>
                 </a:solidFill>
-                <a:latin typeface="paybooc OTF" pitchFamily="34" charset="0"/>
-                <a:ea typeface="paybooc OTF" pitchFamily="34" charset="-122"/>
-                <a:cs typeface="paybooc OTF" pitchFamily="34" charset="-120"/>
+                <a:latin typeface="Pretendard Light" pitchFamily="34" charset="0"/>
+                <a:ea typeface="Pretendard Light" pitchFamily="34" charset="-122"/>
+                <a:cs typeface="Pretendard Light" pitchFamily="34" charset="-120"/>
               </a:rPr>
               <a:t>02 · 대운(大運)</a:t>
             </a:r>
@@ -4494,9 +4494,9 @@
                 <a:solidFill>
                   <a:srgbClr val="777169"/>
                 </a:solidFill>
-                <a:latin typeface="paybooc OTF" pitchFamily="34" charset="0"/>
-                <a:ea typeface="paybooc OTF" pitchFamily="34" charset="-122"/>
-                <a:cs typeface="paybooc OTF" pitchFamily="34" charset="-120"/>
+                <a:latin typeface="Pretendard Light" pitchFamily="34" charset="0"/>
+                <a:ea typeface="Pretendard Light" pitchFamily="34" charset="-122"/>
+                <a:cs typeface="Pretendard Light" pitchFamily="34" charset="-120"/>
               </a:rPr>
               <a:t>한 기둥(2글자)을 앞·뒤 5년으로</a:t>
             </a:r>
@@ -4566,9 +4566,9 @@
                 <a:solidFill>
                   <a:srgbClr val="777169"/>
                 </a:solidFill>
-                <a:latin typeface="paybooc OTF" pitchFamily="34" charset="0"/>
-                <a:ea typeface="paybooc OTF" pitchFamily="34" charset="-122"/>
-                <a:cs typeface="paybooc OTF" pitchFamily="34" charset="-120"/>
+                <a:latin typeface="Pretendard Light" pitchFamily="34" charset="0"/>
+                <a:ea typeface="Pretendard Light" pitchFamily="34" charset="-122"/>
+                <a:cs typeface="Pretendard Light" pitchFamily="34" charset="-120"/>
               </a:rPr>
               <a:t>간지</a:t>
             </a:r>
@@ -4604,9 +4604,9 @@
                 <a:solidFill>
                   <a:srgbClr val="0C0A09"/>
                 </a:solidFill>
-                <a:latin typeface="paybooc OTF" pitchFamily="34" charset="0"/>
-                <a:ea typeface="paybooc OTF" pitchFamily="34" charset="-122"/>
-                <a:cs typeface="paybooc OTF" pitchFamily="34" charset="-120"/>
+                <a:latin typeface="Pretendard Light" pitchFamily="34" charset="0"/>
+                <a:ea typeface="Pretendard Light" pitchFamily="34" charset="-122"/>
+                <a:cs typeface="Pretendard Light" pitchFamily="34" charset="-120"/>
               </a:rPr>
               <a:t>두 글자가 한 칸</a:t>
             </a:r>
@@ -4717,9 +4717,9 @@
                 <a:solidFill>
                   <a:srgbClr val="777169"/>
                 </a:solidFill>
-                <a:latin typeface="paybooc OTF" pitchFamily="34" charset="0"/>
-                <a:ea typeface="paybooc OTF" pitchFamily="34" charset="-122"/>
-                <a:cs typeface="paybooc OTF" pitchFamily="34" charset="-120"/>
+                <a:latin typeface="Pretendard Light" pitchFamily="34" charset="0"/>
+                <a:ea typeface="Pretendard Light" pitchFamily="34" charset="-122"/>
+                <a:cs typeface="Pretendard Light" pitchFamily="34" charset="-120"/>
               </a:rPr>
               <a:t>앞 5년</a:t>
             </a:r>
@@ -4755,9 +4755,9 @@
                 <a:solidFill>
                   <a:srgbClr val="0C0A09"/>
                 </a:solidFill>
-                <a:latin typeface="paybooc OTF" pitchFamily="34" charset="0"/>
-                <a:ea typeface="paybooc OTF" pitchFamily="34" charset="-122"/>
-                <a:cs typeface="paybooc OTF" pitchFamily="34" charset="-120"/>
+                <a:latin typeface="Pretendard Light" pitchFamily="34" charset="0"/>
+                <a:ea typeface="Pretendard Light" pitchFamily="34" charset="-122"/>
+                <a:cs typeface="Pretendard Light" pitchFamily="34" charset="-120"/>
               </a:rPr>
               <a:t>천간이 주도</a:t>
             </a:r>
@@ -4868,9 +4868,9 @@
                 <a:solidFill>
                   <a:srgbClr val="777169"/>
                 </a:solidFill>
-                <a:latin typeface="paybooc OTF" pitchFamily="34" charset="0"/>
-                <a:ea typeface="paybooc OTF" pitchFamily="34" charset="-122"/>
-                <a:cs typeface="paybooc OTF" pitchFamily="34" charset="-120"/>
+                <a:latin typeface="Pretendard Light" pitchFamily="34" charset="0"/>
+                <a:ea typeface="Pretendard Light" pitchFamily="34" charset="-122"/>
+                <a:cs typeface="Pretendard Light" pitchFamily="34" charset="-120"/>
               </a:rPr>
               <a:t>뒤 5년</a:t>
             </a:r>
@@ -4906,9 +4906,9 @@
                 <a:solidFill>
                   <a:srgbClr val="0C0A09"/>
                 </a:solidFill>
-                <a:latin typeface="paybooc OTF" pitchFamily="34" charset="0"/>
-                <a:ea typeface="paybooc OTF" pitchFamily="34" charset="-122"/>
-                <a:cs typeface="paybooc OTF" pitchFamily="34" charset="-120"/>
+                <a:latin typeface="Pretendard Light" pitchFamily="34" charset="0"/>
+                <a:ea typeface="Pretendard Light" pitchFamily="34" charset="-122"/>
+                <a:cs typeface="Pretendard Light" pitchFamily="34" charset="-120"/>
               </a:rPr>
               <a:t>지지가 주도</a:t>
             </a:r>
@@ -5019,9 +5019,9 @@
                 <a:solidFill>
                   <a:srgbClr val="777169"/>
                 </a:solidFill>
-                <a:latin typeface="paybooc OTF" pitchFamily="34" charset="0"/>
-                <a:ea typeface="paybooc OTF" pitchFamily="34" charset="-122"/>
-                <a:cs typeface="paybooc OTF" pitchFamily="34" charset="-120"/>
+                <a:latin typeface="Pretendard Light" pitchFamily="34" charset="0"/>
+                <a:ea typeface="Pretendard Light" pitchFamily="34" charset="-122"/>
+                <a:cs typeface="Pretendard Light" pitchFamily="34" charset="-120"/>
               </a:rPr>
               <a:t>실전 팁</a:t>
             </a:r>
@@ -5274,9 +5274,9 @@
                 <a:solidFill>
                   <a:srgbClr val="0C0A09"/>
                 </a:solidFill>
-                <a:latin typeface="paybooc OTF" pitchFamily="34" charset="0"/>
-                <a:ea typeface="paybooc OTF" pitchFamily="34" charset="-122"/>
-                <a:cs typeface="paybooc OTF" pitchFamily="34" charset="-120"/>
+                <a:latin typeface="Pretendard Light" pitchFamily="34" charset="0"/>
+                <a:ea typeface="Pretendard Light" pitchFamily="34" charset="-122"/>
+                <a:cs typeface="Pretendard Light" pitchFamily="34" charset="-120"/>
               </a:rPr>
               <a:t>수수 사주교육</a:t>
             </a:r>
@@ -5312,9 +5312,9 @@
                 <a:solidFill>
                   <a:srgbClr val="777169"/>
                 </a:solidFill>
-                <a:latin typeface="paybooc OTF" pitchFamily="34" charset="0"/>
-                <a:ea typeface="paybooc OTF" pitchFamily="34" charset="-122"/>
-                <a:cs typeface="paybooc OTF" pitchFamily="34" charset="-120"/>
+                <a:latin typeface="Pretendard Light" pitchFamily="34" charset="0"/>
+                <a:ea typeface="Pretendard Light" pitchFamily="34" charset="-122"/>
+                <a:cs typeface="Pretendard Light" pitchFamily="34" charset="-120"/>
               </a:rPr>
               <a:t>SECTION 03</a:t>
             </a:r>
@@ -5350,9 +5350,9 @@
                 <a:solidFill>
                   <a:srgbClr val="777169"/>
                 </a:solidFill>
-                <a:latin typeface="paybooc OTF" pitchFamily="34" charset="0"/>
-                <a:ea typeface="paybooc OTF" pitchFamily="34" charset="-122"/>
-                <a:cs typeface="paybooc OTF" pitchFamily="34" charset="-120"/>
+                <a:latin typeface="Pretendard Light" pitchFamily="34" charset="0"/>
+                <a:ea typeface="Pretendard Light" pitchFamily="34" charset="-122"/>
+                <a:cs typeface="Pretendard Light" pitchFamily="34" charset="-120"/>
               </a:rPr>
               <a:t>SECTION 03</a:t>
             </a:r>
@@ -5426,9 +5426,9 @@
                 <a:solidFill>
                   <a:srgbClr val="A8A29E"/>
                 </a:solidFill>
-                <a:latin typeface="paybooc OTF" pitchFamily="34" charset="0"/>
-                <a:ea typeface="paybooc OTF" pitchFamily="34" charset="-122"/>
-                <a:cs typeface="paybooc OTF" pitchFamily="34" charset="-120"/>
+                <a:latin typeface="Pretendard Light" pitchFamily="34" charset="0"/>
+                <a:ea typeface="Pretendard Light" pitchFamily="34" charset="-122"/>
+                <a:cs typeface="Pretendard Light" pitchFamily="34" charset="-120"/>
               </a:rPr>
               <a:t>THE YEARLY LUCK</a:t>
             </a:r>
@@ -5659,9 +5659,9 @@
                 <a:solidFill>
                   <a:srgbClr val="0C0A09"/>
                 </a:solidFill>
-                <a:latin typeface="paybooc OTF" pitchFamily="34" charset="0"/>
-                <a:ea typeface="paybooc OTF" pitchFamily="34" charset="-122"/>
-                <a:cs typeface="paybooc OTF" pitchFamily="34" charset="-120"/>
+                <a:latin typeface="Pretendard Light" pitchFamily="34" charset="0"/>
+                <a:ea typeface="Pretendard Light" pitchFamily="34" charset="-122"/>
+                <a:cs typeface="Pretendard Light" pitchFamily="34" charset="-120"/>
               </a:rPr>
               <a:t>수수 사주교육</a:t>
             </a:r>
@@ -5697,9 +5697,9 @@
                 <a:solidFill>
                   <a:srgbClr val="777169"/>
                 </a:solidFill>
-                <a:latin typeface="paybooc OTF" pitchFamily="34" charset="0"/>
-                <a:ea typeface="paybooc OTF" pitchFamily="34" charset="-122"/>
-                <a:cs typeface="paybooc OTF" pitchFamily="34" charset="-120"/>
+                <a:latin typeface="Pretendard Light" pitchFamily="34" charset="0"/>
+                <a:ea typeface="Pretendard Light" pitchFamily="34" charset="-122"/>
+                <a:cs typeface="Pretendard Light" pitchFamily="34" charset="-120"/>
               </a:rPr>
               <a:t>03</a:t>
             </a:r>
@@ -5735,9 +5735,9 @@
                 <a:solidFill>
                   <a:srgbClr val="777169"/>
                 </a:solidFill>
-                <a:latin typeface="paybooc OTF" pitchFamily="34" charset="0"/>
-                <a:ea typeface="paybooc OTF" pitchFamily="34" charset="-122"/>
-                <a:cs typeface="paybooc OTF" pitchFamily="34" charset="-120"/>
+                <a:latin typeface="Pretendard Light" pitchFamily="34" charset="0"/>
+                <a:ea typeface="Pretendard Light" pitchFamily="34" charset="-122"/>
+                <a:cs typeface="Pretendard Light" pitchFamily="34" charset="-120"/>
               </a:rPr>
               <a:t>03 · 세운(歲運)</a:t>
             </a:r>
@@ -5811,9 +5811,9 @@
                 <a:solidFill>
                   <a:srgbClr val="777169"/>
                 </a:solidFill>
-                <a:latin typeface="paybooc OTF" pitchFamily="34" charset="0"/>
-                <a:ea typeface="paybooc OTF" pitchFamily="34" charset="-122"/>
-                <a:cs typeface="paybooc OTF" pitchFamily="34" charset="-120"/>
+                <a:latin typeface="Pretendard Light" pitchFamily="34" charset="0"/>
+                <a:ea typeface="Pretendard Light" pitchFamily="34" charset="-122"/>
+                <a:cs typeface="Pretendard Light" pitchFamily="34" charset="-120"/>
               </a:rPr>
               <a:t>매년 바뀌는 1년의 간지</a:t>
             </a:r>
@@ -5883,9 +5883,9 @@
                 <a:solidFill>
                   <a:srgbClr val="777169"/>
                 </a:solidFill>
-                <a:latin typeface="paybooc OTF" pitchFamily="34" charset="0"/>
-                <a:ea typeface="paybooc OTF" pitchFamily="34" charset="-122"/>
-                <a:cs typeface="paybooc OTF" pitchFamily="34" charset="-120"/>
+                <a:latin typeface="Pretendard Light" pitchFamily="34" charset="0"/>
+                <a:ea typeface="Pretendard Light" pitchFamily="34" charset="-122"/>
+                <a:cs typeface="Pretendard Light" pitchFamily="34" charset="-120"/>
               </a:rPr>
               <a:t>주기</a:t>
             </a:r>
@@ -5921,9 +5921,9 @@
                 <a:solidFill>
                   <a:srgbClr val="0C0A09"/>
                 </a:solidFill>
-                <a:latin typeface="paybooc OTF" pitchFamily="34" charset="0"/>
-                <a:ea typeface="paybooc OTF" pitchFamily="34" charset="-122"/>
-                <a:cs typeface="paybooc OTF" pitchFamily="34" charset="-120"/>
+                <a:latin typeface="Pretendard Light" pitchFamily="34" charset="0"/>
+                <a:ea typeface="Pretendard Light" pitchFamily="34" charset="-122"/>
+                <a:cs typeface="Pretendard Light" pitchFamily="34" charset="-120"/>
               </a:rPr>
               <a:t>1년 단위</a:t>
             </a:r>
@@ -6034,9 +6034,9 @@
                 <a:solidFill>
                   <a:srgbClr val="777169"/>
                 </a:solidFill>
-                <a:latin typeface="paybooc OTF" pitchFamily="34" charset="0"/>
-                <a:ea typeface="paybooc OTF" pitchFamily="34" charset="-122"/>
-                <a:cs typeface="paybooc OTF" pitchFamily="34" charset="-120"/>
+                <a:latin typeface="Pretendard Light" pitchFamily="34" charset="0"/>
+                <a:ea typeface="Pretendard Light" pitchFamily="34" charset="-122"/>
+                <a:cs typeface="Pretendard Light" pitchFamily="34" charset="-120"/>
               </a:rPr>
               <a:t>공통</a:t>
             </a:r>
@@ -6072,9 +6072,9 @@
                 <a:solidFill>
                   <a:srgbClr val="0C0A09"/>
                 </a:solidFill>
-                <a:latin typeface="paybooc OTF" pitchFamily="34" charset="0"/>
-                <a:ea typeface="paybooc OTF" pitchFamily="34" charset="-122"/>
-                <a:cs typeface="paybooc OTF" pitchFamily="34" charset="-120"/>
+                <a:latin typeface="Pretendard Light" pitchFamily="34" charset="0"/>
+                <a:ea typeface="Pretendard Light" pitchFamily="34" charset="-122"/>
+                <a:cs typeface="Pretendard Light" pitchFamily="34" charset="-120"/>
               </a:rPr>
               <a:t>모두에게 동일</a:t>
             </a:r>
@@ -6185,9 +6185,9 @@
                 <a:solidFill>
                   <a:srgbClr val="777169"/>
                 </a:solidFill>
-                <a:latin typeface="paybooc OTF" pitchFamily="34" charset="0"/>
-                <a:ea typeface="paybooc OTF" pitchFamily="34" charset="-122"/>
-                <a:cs typeface="paybooc OTF" pitchFamily="34" charset="-120"/>
+                <a:latin typeface="Pretendard Light" pitchFamily="34" charset="0"/>
+                <a:ea typeface="Pretendard Light" pitchFamily="34" charset="-122"/>
+                <a:cs typeface="Pretendard Light" pitchFamily="34" charset="-120"/>
               </a:rPr>
               <a:t>개인차</a:t>
             </a:r>
@@ -6223,9 +6223,9 @@
                 <a:solidFill>
                   <a:srgbClr val="0C0A09"/>
                 </a:solidFill>
-                <a:latin typeface="paybooc OTF" pitchFamily="34" charset="0"/>
-                <a:ea typeface="paybooc OTF" pitchFamily="34" charset="-122"/>
-                <a:cs typeface="paybooc OTF" pitchFamily="34" charset="-120"/>
+                <a:latin typeface="Pretendard Light" pitchFamily="34" charset="0"/>
+                <a:ea typeface="Pretendard Light" pitchFamily="34" charset="-122"/>
+                <a:cs typeface="Pretendard Light" pitchFamily="34" charset="-120"/>
               </a:rPr>
               <a:t>해석은 제각각</a:t>
             </a:r>
@@ -6336,9 +6336,9 @@
                 <a:solidFill>
                   <a:srgbClr val="777169"/>
                 </a:solidFill>
-                <a:latin typeface="paybooc OTF" pitchFamily="34" charset="0"/>
-                <a:ea typeface="paybooc OTF" pitchFamily="34" charset="-122"/>
-                <a:cs typeface="paybooc OTF" pitchFamily="34" charset="-120"/>
+                <a:latin typeface="Pretendard Light" pitchFamily="34" charset="0"/>
+                <a:ea typeface="Pretendard Light" pitchFamily="34" charset="-122"/>
+                <a:cs typeface="Pretendard Light" pitchFamily="34" charset="-120"/>
               </a:rPr>
               <a:t>올해 예시</a:t>
             </a:r>
@@ -6591,9 +6591,9 @@
                 <a:solidFill>
                   <a:srgbClr val="0C0A09"/>
                 </a:solidFill>
-                <a:latin typeface="paybooc OTF" pitchFamily="34" charset="0"/>
-                <a:ea typeface="paybooc OTF" pitchFamily="34" charset="-122"/>
-                <a:cs typeface="paybooc OTF" pitchFamily="34" charset="-120"/>
+                <a:latin typeface="Pretendard Light" pitchFamily="34" charset="0"/>
+                <a:ea typeface="Pretendard Light" pitchFamily="34" charset="-122"/>
+                <a:cs typeface="Pretendard Light" pitchFamily="34" charset="-120"/>
               </a:rPr>
               <a:t>수수 사주교육</a:t>
             </a:r>
@@ -6629,9 +6629,9 @@
                 <a:solidFill>
                   <a:srgbClr val="777169"/>
                 </a:solidFill>
-                <a:latin typeface="paybooc OTF" pitchFamily="34" charset="0"/>
-                <a:ea typeface="paybooc OTF" pitchFamily="34" charset="-122"/>
-                <a:cs typeface="paybooc OTF" pitchFamily="34" charset="-120"/>
+                <a:latin typeface="Pretendard Light" pitchFamily="34" charset="0"/>
+                <a:ea typeface="Pretendard Light" pitchFamily="34" charset="-122"/>
+                <a:cs typeface="Pretendard Light" pitchFamily="34" charset="-120"/>
               </a:rPr>
               <a:t>03</a:t>
             </a:r>
@@ -6667,9 +6667,9 @@
                 <a:solidFill>
                   <a:srgbClr val="777169"/>
                 </a:solidFill>
-                <a:latin typeface="paybooc OTF" pitchFamily="34" charset="0"/>
-                <a:ea typeface="paybooc OTF" pitchFamily="34" charset="-122"/>
-                <a:cs typeface="paybooc OTF" pitchFamily="34" charset="-120"/>
+                <a:latin typeface="Pretendard Light" pitchFamily="34" charset="0"/>
+                <a:ea typeface="Pretendard Light" pitchFamily="34" charset="-122"/>
+                <a:cs typeface="Pretendard Light" pitchFamily="34" charset="-120"/>
               </a:rPr>
               <a:t>03 · 세운(歲運)</a:t>
             </a:r>
@@ -6743,9 +6743,9 @@
                 <a:solidFill>
                   <a:srgbClr val="777169"/>
                 </a:solidFill>
-                <a:latin typeface="paybooc OTF" pitchFamily="34" charset="0"/>
-                <a:ea typeface="paybooc OTF" pitchFamily="34" charset="-122"/>
-                <a:cs typeface="paybooc OTF" pitchFamily="34" charset="-120"/>
+                <a:latin typeface="Pretendard Light" pitchFamily="34" charset="0"/>
+                <a:ea typeface="Pretendard Light" pitchFamily="34" charset="-122"/>
+                <a:cs typeface="Pretendard Light" pitchFamily="34" charset="-120"/>
               </a:rPr>
               <a:t>무대냐, 사건이냐</a:t>
             </a:r>
@@ -6815,9 +6815,9 @@
                 <a:solidFill>
                   <a:srgbClr val="0C0A09"/>
                 </a:solidFill>
-                <a:latin typeface="paybooc OTF" pitchFamily="34" charset="0"/>
-                <a:ea typeface="paybooc OTF" pitchFamily="34" charset="-122"/>
-                <a:cs typeface="paybooc OTF" pitchFamily="34" charset="-120"/>
+                <a:latin typeface="Pretendard Light" pitchFamily="34" charset="0"/>
+                <a:ea typeface="Pretendard Light" pitchFamily="34" charset="-122"/>
+                <a:cs typeface="Pretendard Light" pitchFamily="34" charset="-120"/>
               </a:rPr>
               <a:t>구분</a:t>
             </a:r>
@@ -6853,9 +6853,9 @@
                 <a:solidFill>
                   <a:srgbClr val="0C0A09"/>
                 </a:solidFill>
-                <a:latin typeface="paybooc OTF" pitchFamily="34" charset="0"/>
-                <a:ea typeface="paybooc OTF" pitchFamily="34" charset="-122"/>
-                <a:cs typeface="paybooc OTF" pitchFamily="34" charset="-120"/>
+                <a:latin typeface="Pretendard Light" pitchFamily="34" charset="0"/>
+                <a:ea typeface="Pretendard Light" pitchFamily="34" charset="-122"/>
+                <a:cs typeface="Pretendard Light" pitchFamily="34" charset="-120"/>
               </a:rPr>
               <a:t>대운(大運)</a:t>
             </a:r>
@@ -6891,9 +6891,9 @@
                 <a:solidFill>
                   <a:srgbClr val="0C0A09"/>
                 </a:solidFill>
-                <a:latin typeface="paybooc OTF" pitchFamily="34" charset="0"/>
-                <a:ea typeface="paybooc OTF" pitchFamily="34" charset="-122"/>
-                <a:cs typeface="paybooc OTF" pitchFamily="34" charset="-120"/>
+                <a:latin typeface="Pretendard Light" pitchFamily="34" charset="0"/>
+                <a:ea typeface="Pretendard Light" pitchFamily="34" charset="-122"/>
+                <a:cs typeface="Pretendard Light" pitchFamily="34" charset="-120"/>
               </a:rPr>
               <a:t>세운(歲運)</a:t>
             </a:r>
@@ -6955,9 +6955,9 @@
                 <a:solidFill>
                   <a:srgbClr val="292524"/>
                 </a:solidFill>
-                <a:latin typeface="paybooc OTF" pitchFamily="34" charset="0"/>
-                <a:ea typeface="paybooc OTF" pitchFamily="34" charset="-122"/>
-                <a:cs typeface="paybooc OTF" pitchFamily="34" charset="-120"/>
+                <a:latin typeface="Pretendard Light" pitchFamily="34" charset="0"/>
+                <a:ea typeface="Pretendard Light" pitchFamily="34" charset="-122"/>
+                <a:cs typeface="Pretendard Light" pitchFamily="34" charset="-120"/>
               </a:rPr>
               <a:t>주기</a:t>
             </a:r>
@@ -7101,9 +7101,9 @@
                 <a:solidFill>
                   <a:srgbClr val="292524"/>
                 </a:solidFill>
-                <a:latin typeface="paybooc OTF" pitchFamily="34" charset="0"/>
-                <a:ea typeface="paybooc OTF" pitchFamily="34" charset="-122"/>
-                <a:cs typeface="paybooc OTF" pitchFamily="34" charset="-120"/>
+                <a:latin typeface="Pretendard Light" pitchFamily="34" charset="0"/>
+                <a:ea typeface="Pretendard Light" pitchFamily="34" charset="-122"/>
+                <a:cs typeface="Pretendard Light" pitchFamily="34" charset="-120"/>
               </a:rPr>
               <a:t>역할</a:t>
             </a:r>
@@ -7247,9 +7247,9 @@
                 <a:solidFill>
                   <a:srgbClr val="292524"/>
                 </a:solidFill>
-                <a:latin typeface="paybooc OTF" pitchFamily="34" charset="0"/>
-                <a:ea typeface="paybooc OTF" pitchFamily="34" charset="-122"/>
-                <a:cs typeface="paybooc OTF" pitchFamily="34" charset="-120"/>
+                <a:latin typeface="Pretendard Light" pitchFamily="34" charset="0"/>
+                <a:ea typeface="Pretendard Light" pitchFamily="34" charset="-122"/>
+                <a:cs typeface="Pretendard Light" pitchFamily="34" charset="-120"/>
               </a:rPr>
               <a:t>비유</a:t>
             </a:r>
@@ -7393,9 +7393,9 @@
                 <a:solidFill>
                   <a:srgbClr val="292524"/>
                 </a:solidFill>
-                <a:latin typeface="paybooc OTF" pitchFamily="34" charset="0"/>
-                <a:ea typeface="paybooc OTF" pitchFamily="34" charset="-122"/>
-                <a:cs typeface="paybooc OTF" pitchFamily="34" charset="-120"/>
+                <a:latin typeface="Pretendard Light" pitchFamily="34" charset="0"/>
+                <a:ea typeface="Pretendard Light" pitchFamily="34" charset="-122"/>
+                <a:cs typeface="Pretendard Light" pitchFamily="34" charset="-120"/>
               </a:rPr>
               <a:t>바뀜</a:t>
             </a:r>
@@ -7539,9 +7539,9 @@
                 <a:solidFill>
                   <a:srgbClr val="292524"/>
                 </a:solidFill>
-                <a:latin typeface="paybooc OTF" pitchFamily="34" charset="0"/>
-                <a:ea typeface="paybooc OTF" pitchFamily="34" charset="-122"/>
-                <a:cs typeface="paybooc OTF" pitchFamily="34" charset="-120"/>
+                <a:latin typeface="Pretendard Light" pitchFamily="34" charset="0"/>
+                <a:ea typeface="Pretendard Light" pitchFamily="34" charset="-122"/>
+                <a:cs typeface="Pretendard Light" pitchFamily="34" charset="-120"/>
               </a:rPr>
               <a:t>관점</a:t>
             </a:r>
@@ -7859,9 +7859,9 @@
                 <a:solidFill>
                   <a:srgbClr val="0C0A09"/>
                 </a:solidFill>
-                <a:latin typeface="paybooc OTF" pitchFamily="34" charset="0"/>
-                <a:ea typeface="paybooc OTF" pitchFamily="34" charset="-122"/>
-                <a:cs typeface="paybooc OTF" pitchFamily="34" charset="-120"/>
+                <a:latin typeface="Pretendard Light" pitchFamily="34" charset="0"/>
+                <a:ea typeface="Pretendard Light" pitchFamily="34" charset="-122"/>
+                <a:cs typeface="Pretendard Light" pitchFamily="34" charset="-120"/>
               </a:rPr>
               <a:t>수수 사주교육</a:t>
             </a:r>
@@ -7897,9 +7897,9 @@
                 <a:solidFill>
                   <a:srgbClr val="777169"/>
                 </a:solidFill>
-                <a:latin typeface="paybooc OTF" pitchFamily="34" charset="0"/>
-                <a:ea typeface="paybooc OTF" pitchFamily="34" charset="-122"/>
-                <a:cs typeface="paybooc OTF" pitchFamily="34" charset="-120"/>
+                <a:latin typeface="Pretendard Light" pitchFamily="34" charset="0"/>
+                <a:ea typeface="Pretendard Light" pitchFamily="34" charset="-122"/>
+                <a:cs typeface="Pretendard Light" pitchFamily="34" charset="-120"/>
               </a:rPr>
               <a:t>03</a:t>
             </a:r>
@@ -7935,9 +7935,9 @@
                 <a:solidFill>
                   <a:srgbClr val="777169"/>
                 </a:solidFill>
-                <a:latin typeface="paybooc OTF" pitchFamily="34" charset="0"/>
-                <a:ea typeface="paybooc OTF" pitchFamily="34" charset="-122"/>
-                <a:cs typeface="paybooc OTF" pitchFamily="34" charset="-120"/>
+                <a:latin typeface="Pretendard Light" pitchFamily="34" charset="0"/>
+                <a:ea typeface="Pretendard Light" pitchFamily="34" charset="-122"/>
+                <a:cs typeface="Pretendard Light" pitchFamily="34" charset="-120"/>
               </a:rPr>
               <a:t>03 · 세운(歲運)</a:t>
             </a:r>
@@ -8011,9 +8011,9 @@
                 <a:solidFill>
                   <a:srgbClr val="777169"/>
                 </a:solidFill>
-                <a:latin typeface="paybooc OTF" pitchFamily="34" charset="0"/>
-                <a:ea typeface="paybooc OTF" pitchFamily="34" charset="-122"/>
-                <a:cs typeface="paybooc OTF" pitchFamily="34" charset="-120"/>
+                <a:latin typeface="Pretendard Light" pitchFamily="34" charset="0"/>
+                <a:ea typeface="Pretendard Light" pitchFamily="34" charset="-122"/>
+                <a:cs typeface="Pretendard Light" pitchFamily="34" charset="-120"/>
               </a:rPr>
               <a:t>1년을 다시 12달로 쪼갠다</a:t>
             </a:r>
@@ -8083,9 +8083,9 @@
                 <a:solidFill>
                   <a:srgbClr val="4E4E4E"/>
                 </a:solidFill>
-                <a:latin typeface="paybooc OTF" pitchFamily="34" charset="0"/>
-                <a:ea typeface="paybooc OTF" pitchFamily="34" charset="-122"/>
-                <a:cs typeface="paybooc OTF" pitchFamily="34" charset="-120"/>
+                <a:latin typeface="Pretendard Light" pitchFamily="34" charset="0"/>
+                <a:ea typeface="Pretendard Light" pitchFamily="34" charset="-122"/>
+                <a:cs typeface="Pretendard Light" pitchFamily="34" charset="-120"/>
               </a:rPr>
               <a:t>1월</a:t>
             </a:r>
@@ -8155,9 +8155,9 @@
                 <a:solidFill>
                   <a:srgbClr val="4E4E4E"/>
                 </a:solidFill>
-                <a:latin typeface="paybooc OTF" pitchFamily="34" charset="0"/>
-                <a:ea typeface="paybooc OTF" pitchFamily="34" charset="-122"/>
-                <a:cs typeface="paybooc OTF" pitchFamily="34" charset="-120"/>
+                <a:latin typeface="Pretendard Light" pitchFamily="34" charset="0"/>
+                <a:ea typeface="Pretendard Light" pitchFamily="34" charset="-122"/>
+                <a:cs typeface="Pretendard Light" pitchFamily="34" charset="-120"/>
               </a:rPr>
               <a:t>2월</a:t>
             </a:r>
@@ -8227,9 +8227,9 @@
                 <a:solidFill>
                   <a:srgbClr val="4E4E4E"/>
                 </a:solidFill>
-                <a:latin typeface="paybooc OTF" pitchFamily="34" charset="0"/>
-                <a:ea typeface="paybooc OTF" pitchFamily="34" charset="-122"/>
-                <a:cs typeface="paybooc OTF" pitchFamily="34" charset="-120"/>
+                <a:latin typeface="Pretendard Light" pitchFamily="34" charset="0"/>
+                <a:ea typeface="Pretendard Light" pitchFamily="34" charset="-122"/>
+                <a:cs typeface="Pretendard Light" pitchFamily="34" charset="-120"/>
               </a:rPr>
               <a:t>3월</a:t>
             </a:r>
@@ -8299,9 +8299,9 @@
                 <a:solidFill>
                   <a:srgbClr val="4E4E4E"/>
                 </a:solidFill>
-                <a:latin typeface="paybooc OTF" pitchFamily="34" charset="0"/>
-                <a:ea typeface="paybooc OTF" pitchFamily="34" charset="-122"/>
-                <a:cs typeface="paybooc OTF" pitchFamily="34" charset="-120"/>
+                <a:latin typeface="Pretendard Light" pitchFamily="34" charset="0"/>
+                <a:ea typeface="Pretendard Light" pitchFamily="34" charset="-122"/>
+                <a:cs typeface="Pretendard Light" pitchFamily="34" charset="-120"/>
               </a:rPr>
               <a:t>4월</a:t>
             </a:r>
@@ -8371,9 +8371,9 @@
                 <a:solidFill>
                   <a:srgbClr val="4E4E4E"/>
                 </a:solidFill>
-                <a:latin typeface="paybooc OTF" pitchFamily="34" charset="0"/>
-                <a:ea typeface="paybooc OTF" pitchFamily="34" charset="-122"/>
-                <a:cs typeface="paybooc OTF" pitchFamily="34" charset="-120"/>
+                <a:latin typeface="Pretendard Light" pitchFamily="34" charset="0"/>
+                <a:ea typeface="Pretendard Light" pitchFamily="34" charset="-122"/>
+                <a:cs typeface="Pretendard Light" pitchFamily="34" charset="-120"/>
               </a:rPr>
               <a:t>5월</a:t>
             </a:r>
@@ -8443,9 +8443,9 @@
                 <a:solidFill>
                   <a:srgbClr val="0C0A09"/>
                 </a:solidFill>
-                <a:latin typeface="paybooc OTF" pitchFamily="34" charset="0"/>
-                <a:ea typeface="paybooc OTF" pitchFamily="34" charset="-122"/>
-                <a:cs typeface="paybooc OTF" pitchFamily="34" charset="-120"/>
+                <a:latin typeface="Pretendard Light" pitchFamily="34" charset="0"/>
+                <a:ea typeface="Pretendard Light" pitchFamily="34" charset="-122"/>
+                <a:cs typeface="Pretendard Light" pitchFamily="34" charset="-120"/>
               </a:rPr>
               <a:t>6월</a:t>
             </a:r>
@@ -8515,9 +8515,9 @@
                 <a:solidFill>
                   <a:srgbClr val="4E4E4E"/>
                 </a:solidFill>
-                <a:latin typeface="paybooc OTF" pitchFamily="34" charset="0"/>
-                <a:ea typeface="paybooc OTF" pitchFamily="34" charset="-122"/>
-                <a:cs typeface="paybooc OTF" pitchFamily="34" charset="-120"/>
+                <a:latin typeface="Pretendard Light" pitchFamily="34" charset="0"/>
+                <a:ea typeface="Pretendard Light" pitchFamily="34" charset="-122"/>
+                <a:cs typeface="Pretendard Light" pitchFamily="34" charset="-120"/>
               </a:rPr>
               <a:t>7월</a:t>
             </a:r>
@@ -8587,9 +8587,9 @@
                 <a:solidFill>
                   <a:srgbClr val="4E4E4E"/>
                 </a:solidFill>
-                <a:latin typeface="paybooc OTF" pitchFamily="34" charset="0"/>
-                <a:ea typeface="paybooc OTF" pitchFamily="34" charset="-122"/>
-                <a:cs typeface="paybooc OTF" pitchFamily="34" charset="-120"/>
+                <a:latin typeface="Pretendard Light" pitchFamily="34" charset="0"/>
+                <a:ea typeface="Pretendard Light" pitchFamily="34" charset="-122"/>
+                <a:cs typeface="Pretendard Light" pitchFamily="34" charset="-120"/>
               </a:rPr>
               <a:t>8월</a:t>
             </a:r>
@@ -8659,9 +8659,9 @@
                 <a:solidFill>
                   <a:srgbClr val="4E4E4E"/>
                 </a:solidFill>
-                <a:latin typeface="paybooc OTF" pitchFamily="34" charset="0"/>
-                <a:ea typeface="paybooc OTF" pitchFamily="34" charset="-122"/>
-                <a:cs typeface="paybooc OTF" pitchFamily="34" charset="-120"/>
+                <a:latin typeface="Pretendard Light" pitchFamily="34" charset="0"/>
+                <a:ea typeface="Pretendard Light" pitchFamily="34" charset="-122"/>
+                <a:cs typeface="Pretendard Light" pitchFamily="34" charset="-120"/>
               </a:rPr>
               <a:t>9월</a:t>
             </a:r>
@@ -8731,9 +8731,9 @@
                 <a:solidFill>
                   <a:srgbClr val="4E4E4E"/>
                 </a:solidFill>
-                <a:latin typeface="paybooc OTF" pitchFamily="34" charset="0"/>
-                <a:ea typeface="paybooc OTF" pitchFamily="34" charset="-122"/>
-                <a:cs typeface="paybooc OTF" pitchFamily="34" charset="-120"/>
+                <a:latin typeface="Pretendard Light" pitchFamily="34" charset="0"/>
+                <a:ea typeface="Pretendard Light" pitchFamily="34" charset="-122"/>
+                <a:cs typeface="Pretendard Light" pitchFamily="34" charset="-120"/>
               </a:rPr>
               <a:t>10월</a:t>
             </a:r>
@@ -8803,9 +8803,9 @@
                 <a:solidFill>
                   <a:srgbClr val="4E4E4E"/>
                 </a:solidFill>
-                <a:latin typeface="paybooc OTF" pitchFamily="34" charset="0"/>
-                <a:ea typeface="paybooc OTF" pitchFamily="34" charset="-122"/>
-                <a:cs typeface="paybooc OTF" pitchFamily="34" charset="-120"/>
+                <a:latin typeface="Pretendard Light" pitchFamily="34" charset="0"/>
+                <a:ea typeface="Pretendard Light" pitchFamily="34" charset="-122"/>
+                <a:cs typeface="Pretendard Light" pitchFamily="34" charset="-120"/>
               </a:rPr>
               <a:t>11월</a:t>
             </a:r>
@@ -8875,9 +8875,9 @@
                 <a:solidFill>
                   <a:srgbClr val="4E4E4E"/>
                 </a:solidFill>
-                <a:latin typeface="paybooc OTF" pitchFamily="34" charset="0"/>
-                <a:ea typeface="paybooc OTF" pitchFamily="34" charset="-122"/>
-                <a:cs typeface="paybooc OTF" pitchFamily="34" charset="-120"/>
+                <a:latin typeface="Pretendard Light" pitchFamily="34" charset="0"/>
+                <a:ea typeface="Pretendard Light" pitchFamily="34" charset="-122"/>
+                <a:cs typeface="Pretendard Light" pitchFamily="34" charset="-120"/>
               </a:rPr>
               <a:t>12월</a:t>
             </a:r>
@@ -8947,9 +8947,9 @@
                 <a:solidFill>
                   <a:srgbClr val="777169"/>
                 </a:solidFill>
-                <a:latin typeface="paybooc OTF" pitchFamily="34" charset="0"/>
-                <a:ea typeface="paybooc OTF" pitchFamily="34" charset="-122"/>
-                <a:cs typeface="paybooc OTF" pitchFamily="34" charset="-120"/>
+                <a:latin typeface="Pretendard Light" pitchFamily="34" charset="0"/>
+                <a:ea typeface="Pretendard Light" pitchFamily="34" charset="-122"/>
+                <a:cs typeface="Pretendard Light" pitchFamily="34" charset="-120"/>
               </a:rPr>
               <a:t>쓰임</a:t>
             </a:r>
@@ -9221,9 +9221,9 @@
                 <a:solidFill>
                   <a:srgbClr val="0C0A09"/>
                 </a:solidFill>
-                <a:latin typeface="paybooc OTF" pitchFamily="34" charset="0"/>
-                <a:ea typeface="paybooc OTF" pitchFamily="34" charset="-122"/>
-                <a:cs typeface="paybooc OTF" pitchFamily="34" charset="-120"/>
+                <a:latin typeface="Pretendard Light" pitchFamily="34" charset="0"/>
+                <a:ea typeface="Pretendard Light" pitchFamily="34" charset="-122"/>
+                <a:cs typeface="Pretendard Light" pitchFamily="34" charset="-120"/>
               </a:rPr>
               <a:t>수수 사주교육</a:t>
             </a:r>
@@ -9259,9 +9259,9 @@
                 <a:solidFill>
                   <a:srgbClr val="777169"/>
                 </a:solidFill>
-                <a:latin typeface="paybooc OTF" pitchFamily="34" charset="0"/>
-                <a:ea typeface="paybooc OTF" pitchFamily="34" charset="-122"/>
-                <a:cs typeface="paybooc OTF" pitchFamily="34" charset="-120"/>
+                <a:latin typeface="Pretendard Light" pitchFamily="34" charset="0"/>
+                <a:ea typeface="Pretendard Light" pitchFamily="34" charset="-122"/>
+                <a:cs typeface="Pretendard Light" pitchFamily="34" charset="-120"/>
               </a:rPr>
               <a:t>SECTION 04</a:t>
             </a:r>
@@ -9297,9 +9297,9 @@
                 <a:solidFill>
                   <a:srgbClr val="777169"/>
                 </a:solidFill>
-                <a:latin typeface="paybooc OTF" pitchFamily="34" charset="0"/>
-                <a:ea typeface="paybooc OTF" pitchFamily="34" charset="-122"/>
-                <a:cs typeface="paybooc OTF" pitchFamily="34" charset="-120"/>
+                <a:latin typeface="Pretendard Light" pitchFamily="34" charset="0"/>
+                <a:ea typeface="Pretendard Light" pitchFamily="34" charset="-122"/>
+                <a:cs typeface="Pretendard Light" pitchFamily="34" charset="-120"/>
               </a:rPr>
               <a:t>SECTION 04</a:t>
             </a:r>
@@ -9373,9 +9373,9 @@
                 <a:solidFill>
                   <a:srgbClr val="A8A29E"/>
                 </a:solidFill>
-                <a:latin typeface="paybooc OTF" pitchFamily="34" charset="0"/>
-                <a:ea typeface="paybooc OTF" pitchFamily="34" charset="-122"/>
-                <a:cs typeface="paybooc OTF" pitchFamily="34" charset="-120"/>
+                <a:latin typeface="Pretendard Light" pitchFamily="34" charset="0"/>
+                <a:ea typeface="Pretendard Light" pitchFamily="34" charset="-122"/>
+                <a:cs typeface="Pretendard Light" pitchFamily="34" charset="-120"/>
               </a:rPr>
               <a:t>READING THE CHART · 실습</a:t>
             </a:r>
@@ -9606,9 +9606,9 @@
                 <a:solidFill>
                   <a:srgbClr val="0C0A09"/>
                 </a:solidFill>
-                <a:latin typeface="paybooc OTF" pitchFamily="34" charset="0"/>
-                <a:ea typeface="paybooc OTF" pitchFamily="34" charset="-122"/>
-                <a:cs typeface="paybooc OTF" pitchFamily="34" charset="-120"/>
+                <a:latin typeface="Pretendard Light" pitchFamily="34" charset="0"/>
+                <a:ea typeface="Pretendard Light" pitchFamily="34" charset="-122"/>
+                <a:cs typeface="Pretendard Light" pitchFamily="34" charset="-120"/>
               </a:rPr>
               <a:t>수수 사주교육</a:t>
             </a:r>
@@ -9644,9 +9644,9 @@
                 <a:solidFill>
                   <a:srgbClr val="777169"/>
                 </a:solidFill>
-                <a:latin typeface="paybooc OTF" pitchFamily="34" charset="0"/>
-                <a:ea typeface="paybooc OTF" pitchFamily="34" charset="-122"/>
-                <a:cs typeface="paybooc OTF" pitchFamily="34" charset="-120"/>
+                <a:latin typeface="Pretendard Light" pitchFamily="34" charset="0"/>
+                <a:ea typeface="Pretendard Light" pitchFamily="34" charset="-122"/>
+                <a:cs typeface="Pretendard Light" pitchFamily="34" charset="-120"/>
               </a:rPr>
               <a:t>AGENDA</a:t>
             </a:r>
@@ -9682,9 +9682,9 @@
                 <a:solidFill>
                   <a:srgbClr val="777169"/>
                 </a:solidFill>
-                <a:latin typeface="paybooc OTF" pitchFamily="34" charset="0"/>
-                <a:ea typeface="paybooc OTF" pitchFamily="34" charset="-122"/>
-                <a:cs typeface="paybooc OTF" pitchFamily="34" charset="-120"/>
+                <a:latin typeface="Pretendard Light" pitchFamily="34" charset="0"/>
+                <a:ea typeface="Pretendard Light" pitchFamily="34" charset="-122"/>
+                <a:cs typeface="Pretendard Light" pitchFamily="34" charset="-120"/>
               </a:rPr>
               <a:t>COURSE OVERVIEW</a:t>
             </a:r>
@@ -9758,9 +9758,9 @@
                 <a:solidFill>
                   <a:srgbClr val="777169"/>
                 </a:solidFill>
-                <a:latin typeface="paybooc OTF" pitchFamily="34" charset="0"/>
-                <a:ea typeface="paybooc OTF" pitchFamily="34" charset="-122"/>
-                <a:cs typeface="paybooc OTF" pitchFamily="34" charset="-120"/>
+                <a:latin typeface="Pretendard Light" pitchFamily="34" charset="0"/>
+                <a:ea typeface="Pretendard Light" pitchFamily="34" charset="-122"/>
+                <a:cs typeface="Pretendard Light" pitchFamily="34" charset="-120"/>
               </a:rPr>
               <a:t>오늘 따라갈 다섯 개의 흐름</a:t>
             </a:r>
@@ -9856,9 +9856,9 @@
                 <a:solidFill>
                   <a:srgbClr val="0C0A09"/>
                 </a:solidFill>
-                <a:latin typeface="paybooc OTF" pitchFamily="34" charset="0"/>
-                <a:ea typeface="paybooc OTF" pitchFamily="34" charset="-122"/>
-                <a:cs typeface="paybooc OTF" pitchFamily="34" charset="-120"/>
+                <a:latin typeface="Pretendard Light" pitchFamily="34" charset="0"/>
+                <a:ea typeface="Pretendard Light" pitchFamily="34" charset="-122"/>
+                <a:cs typeface="Pretendard Light" pitchFamily="34" charset="-120"/>
               </a:rPr>
               <a:t>사주와 운의 관계</a:t>
             </a:r>
@@ -10015,9 +10015,9 @@
                 <a:solidFill>
                   <a:srgbClr val="0C0A09"/>
                 </a:solidFill>
-                <a:latin typeface="paybooc OTF" pitchFamily="34" charset="0"/>
-                <a:ea typeface="paybooc OTF" pitchFamily="34" charset="-122"/>
-                <a:cs typeface="paybooc OTF" pitchFamily="34" charset="-120"/>
+                <a:latin typeface="Pretendard Light" pitchFamily="34" charset="0"/>
+                <a:ea typeface="Pretendard Light" pitchFamily="34" charset="-122"/>
+                <a:cs typeface="Pretendard Light" pitchFamily="34" charset="-120"/>
               </a:rPr>
               <a:t>대운(大運)</a:t>
             </a:r>
@@ -10174,9 +10174,9 @@
                 <a:solidFill>
                   <a:srgbClr val="0C0A09"/>
                 </a:solidFill>
-                <a:latin typeface="paybooc OTF" pitchFamily="34" charset="0"/>
-                <a:ea typeface="paybooc OTF" pitchFamily="34" charset="-122"/>
-                <a:cs typeface="paybooc OTF" pitchFamily="34" charset="-120"/>
+                <a:latin typeface="Pretendard Light" pitchFamily="34" charset="0"/>
+                <a:ea typeface="Pretendard Light" pitchFamily="34" charset="-122"/>
+                <a:cs typeface="Pretendard Light" pitchFamily="34" charset="-120"/>
               </a:rPr>
               <a:t>세운(歲運)</a:t>
             </a:r>
@@ -10333,9 +10333,9 @@
                 <a:solidFill>
                   <a:srgbClr val="0C0A09"/>
                 </a:solidFill>
-                <a:latin typeface="paybooc OTF" pitchFamily="34" charset="0"/>
-                <a:ea typeface="paybooc OTF" pitchFamily="34" charset="-122"/>
-                <a:cs typeface="paybooc OTF" pitchFamily="34" charset="-120"/>
+                <a:latin typeface="Pretendard Light" pitchFamily="34" charset="0"/>
+                <a:ea typeface="Pretendard Light" pitchFamily="34" charset="-122"/>
+                <a:cs typeface="Pretendard Light" pitchFamily="34" charset="-120"/>
               </a:rPr>
               <a:t>만세력으로 직접 읽기</a:t>
             </a:r>
@@ -10492,9 +10492,9 @@
                 <a:solidFill>
                   <a:srgbClr val="0C0A09"/>
                 </a:solidFill>
-                <a:latin typeface="paybooc OTF" pitchFamily="34" charset="0"/>
-                <a:ea typeface="paybooc OTF" pitchFamily="34" charset="-122"/>
-                <a:cs typeface="paybooc OTF" pitchFamily="34" charset="-120"/>
+                <a:latin typeface="Pretendard Light" pitchFamily="34" charset="0"/>
+                <a:ea typeface="Pretendard Light" pitchFamily="34" charset="-122"/>
+                <a:cs typeface="Pretendard Light" pitchFamily="34" charset="-120"/>
               </a:rPr>
               <a:t>운 해석의 기초</a:t>
             </a:r>
@@ -10722,9 +10722,9 @@
                 <a:solidFill>
                   <a:srgbClr val="0C0A09"/>
                 </a:solidFill>
-                <a:latin typeface="paybooc OTF" pitchFamily="34" charset="0"/>
-                <a:ea typeface="paybooc OTF" pitchFamily="34" charset="-122"/>
-                <a:cs typeface="paybooc OTF" pitchFamily="34" charset="-120"/>
+                <a:latin typeface="Pretendard Light" pitchFamily="34" charset="0"/>
+                <a:ea typeface="Pretendard Light" pitchFamily="34" charset="-122"/>
+                <a:cs typeface="Pretendard Light" pitchFamily="34" charset="-120"/>
               </a:rPr>
               <a:t>수수 사주교육</a:t>
             </a:r>
@@ -10760,9 +10760,9 @@
                 <a:solidFill>
                   <a:srgbClr val="777169"/>
                 </a:solidFill>
-                <a:latin typeface="paybooc OTF" pitchFamily="34" charset="0"/>
-                <a:ea typeface="paybooc OTF" pitchFamily="34" charset="-122"/>
-                <a:cs typeface="paybooc OTF" pitchFamily="34" charset="-120"/>
+                <a:latin typeface="Pretendard Light" pitchFamily="34" charset="0"/>
+                <a:ea typeface="Pretendard Light" pitchFamily="34" charset="-122"/>
+                <a:cs typeface="Pretendard Light" pitchFamily="34" charset="-120"/>
               </a:rPr>
               <a:t>04</a:t>
             </a:r>
@@ -10798,9 +10798,9 @@
                 <a:solidFill>
                   <a:srgbClr val="777169"/>
                 </a:solidFill>
-                <a:latin typeface="paybooc OTF" pitchFamily="34" charset="0"/>
-                <a:ea typeface="paybooc OTF" pitchFamily="34" charset="-122"/>
-                <a:cs typeface="paybooc OTF" pitchFamily="34" charset="-120"/>
+                <a:latin typeface="Pretendard Light" pitchFamily="34" charset="0"/>
+                <a:ea typeface="Pretendard Light" pitchFamily="34" charset="-122"/>
+                <a:cs typeface="Pretendard Light" pitchFamily="34" charset="-120"/>
               </a:rPr>
               <a:t>04 · 만세력으로 직접 읽기</a:t>
             </a:r>
@@ -10874,9 +10874,9 @@
                 <a:solidFill>
                   <a:srgbClr val="777169"/>
                 </a:solidFill>
-                <a:latin typeface="paybooc OTF" pitchFamily="34" charset="0"/>
-                <a:ea typeface="paybooc OTF" pitchFamily="34" charset="-122"/>
-                <a:cs typeface="paybooc OTF" pitchFamily="34" charset="-120"/>
+                <a:latin typeface="Pretendard Light" pitchFamily="34" charset="0"/>
+                <a:ea typeface="Pretendard Light" pitchFamily="34" charset="-122"/>
+                <a:cs typeface="Pretendard Light" pitchFamily="34" charset="-120"/>
               </a:rPr>
               <a:t>원국 · 대운 · 세운의 위치 (예시 화면)</a:t>
             </a:r>
@@ -11006,9 +11006,9 @@
                 <a:solidFill>
                   <a:srgbClr val="0C0A09"/>
                 </a:solidFill>
-                <a:latin typeface="paybooc OTF" pitchFamily="34" charset="0"/>
-                <a:ea typeface="paybooc OTF" pitchFamily="34" charset="-122"/>
-                <a:cs typeface="paybooc OTF" pitchFamily="34" charset="-120"/>
+                <a:latin typeface="Pretendard Light" pitchFamily="34" charset="0"/>
+                <a:ea typeface="Pretendard Light" pitchFamily="34" charset="-122"/>
+                <a:cs typeface="Pretendard Light" pitchFamily="34" charset="-120"/>
               </a:rPr>
               <a:t>원국 (사주팔자)</a:t>
             </a:r>
@@ -11706,9 +11706,9 @@
                 <a:solidFill>
                   <a:srgbClr val="0C0A09"/>
                 </a:solidFill>
-                <a:latin typeface="paybooc OTF" pitchFamily="34" charset="0"/>
-                <a:ea typeface="paybooc OTF" pitchFamily="34" charset="-122"/>
-                <a:cs typeface="paybooc OTF" pitchFamily="34" charset="-120"/>
+                <a:latin typeface="Pretendard Light" pitchFamily="34" charset="0"/>
+                <a:ea typeface="Pretendard Light" pitchFamily="34" charset="-122"/>
+                <a:cs typeface="Pretendard Light" pitchFamily="34" charset="-120"/>
               </a:rPr>
               <a:t>대운 (10년 단위)</a:t>
             </a:r>
@@ -12357,9 +12357,9 @@
                 <a:solidFill>
                   <a:srgbClr val="0C0A09"/>
                 </a:solidFill>
-                <a:latin typeface="paybooc OTF" pitchFamily="34" charset="0"/>
-                <a:ea typeface="paybooc OTF" pitchFamily="34" charset="-122"/>
-                <a:cs typeface="paybooc OTF" pitchFamily="34" charset="-120"/>
+                <a:latin typeface="Pretendard Light" pitchFamily="34" charset="0"/>
+                <a:ea typeface="Pretendard Light" pitchFamily="34" charset="-122"/>
+                <a:cs typeface="Pretendard Light" pitchFamily="34" charset="-120"/>
               </a:rPr>
               <a:t>세운 (올해)</a:t>
             </a:r>
@@ -12896,9 +12896,9 @@
                 <a:solidFill>
                   <a:srgbClr val="0C0A09"/>
                 </a:solidFill>
-                <a:latin typeface="paybooc OTF" pitchFamily="34" charset="0"/>
-                <a:ea typeface="paybooc OTF" pitchFamily="34" charset="-122"/>
-                <a:cs typeface="paybooc OTF" pitchFamily="34" charset="-120"/>
+                <a:latin typeface="Pretendard Light" pitchFamily="34" charset="0"/>
+                <a:ea typeface="Pretendard Light" pitchFamily="34" charset="-122"/>
+                <a:cs typeface="Pretendard Light" pitchFamily="34" charset="-120"/>
               </a:rPr>
               <a:t>수수 사주교육</a:t>
             </a:r>
@@ -12934,9 +12934,9 @@
                 <a:solidFill>
                   <a:srgbClr val="777169"/>
                 </a:solidFill>
-                <a:latin typeface="paybooc OTF" pitchFamily="34" charset="0"/>
-                <a:ea typeface="paybooc OTF" pitchFamily="34" charset="-122"/>
-                <a:cs typeface="paybooc OTF" pitchFamily="34" charset="-120"/>
+                <a:latin typeface="Pretendard Light" pitchFamily="34" charset="0"/>
+                <a:ea typeface="Pretendard Light" pitchFamily="34" charset="-122"/>
+                <a:cs typeface="Pretendard Light" pitchFamily="34" charset="-120"/>
               </a:rPr>
               <a:t>04</a:t>
             </a:r>
@@ -12972,9 +12972,9 @@
                 <a:solidFill>
                   <a:srgbClr val="777169"/>
                 </a:solidFill>
-                <a:latin typeface="paybooc OTF" pitchFamily="34" charset="0"/>
-                <a:ea typeface="paybooc OTF" pitchFamily="34" charset="-122"/>
-                <a:cs typeface="paybooc OTF" pitchFamily="34" charset="-120"/>
+                <a:latin typeface="Pretendard Light" pitchFamily="34" charset="0"/>
+                <a:ea typeface="Pretendard Light" pitchFamily="34" charset="-122"/>
+                <a:cs typeface="Pretendard Light" pitchFamily="34" charset="-120"/>
               </a:rPr>
               <a:t>04 · 만세력으로 직접 읽기</a:t>
             </a:r>
@@ -13048,9 +13048,9 @@
                 <a:solidFill>
                   <a:srgbClr val="777169"/>
                 </a:solidFill>
-                <a:latin typeface="paybooc OTF" pitchFamily="34" charset="0"/>
-                <a:ea typeface="paybooc OTF" pitchFamily="34" charset="-122"/>
-                <a:cs typeface="paybooc OTF" pitchFamily="34" charset="-120"/>
+                <a:latin typeface="Pretendard Light" pitchFamily="34" charset="0"/>
+                <a:ea typeface="Pretendard Light" pitchFamily="34" charset="-122"/>
+                <a:cs typeface="Pretendard Light" pitchFamily="34" charset="-120"/>
               </a:rPr>
               <a:t>내 대운이 몇 살에 바뀌는지</a:t>
             </a:r>
@@ -13180,9 +13180,9 @@
                 <a:solidFill>
                   <a:srgbClr val="0C0A09"/>
                 </a:solidFill>
-                <a:latin typeface="paybooc OTF" pitchFamily="34" charset="0"/>
-                <a:ea typeface="paybooc OTF" pitchFamily="34" charset="-122"/>
-                <a:cs typeface="paybooc OTF" pitchFamily="34" charset="-120"/>
+                <a:latin typeface="Pretendard Light" pitchFamily="34" charset="0"/>
+                <a:ea typeface="Pretendard Light" pitchFamily="34" charset="-122"/>
+                <a:cs typeface="Pretendard Light" pitchFamily="34" charset="-120"/>
               </a:rPr>
               <a:t>대운수를 확인한다</a:t>
             </a:r>
@@ -13353,9 +13353,9 @@
                 <a:solidFill>
                   <a:srgbClr val="0C0A09"/>
                 </a:solidFill>
-                <a:latin typeface="paybooc OTF" pitchFamily="34" charset="0"/>
-                <a:ea typeface="paybooc OTF" pitchFamily="34" charset="-122"/>
-                <a:cs typeface="paybooc OTF" pitchFamily="34" charset="-120"/>
+                <a:latin typeface="Pretendard Light" pitchFamily="34" charset="0"/>
+                <a:ea typeface="Pretendard Light" pitchFamily="34" charset="-122"/>
+                <a:cs typeface="Pretendard Light" pitchFamily="34" charset="-120"/>
               </a:rPr>
               <a:t>지금 내 대운 칸을 찾는다</a:t>
             </a:r>
@@ -13526,9 +13526,9 @@
                 <a:solidFill>
                   <a:srgbClr val="0C0A09"/>
                 </a:solidFill>
-                <a:latin typeface="paybooc OTF" pitchFamily="34" charset="0"/>
-                <a:ea typeface="paybooc OTF" pitchFamily="34" charset="-122"/>
-                <a:cs typeface="paybooc OTF" pitchFamily="34" charset="-120"/>
+                <a:latin typeface="Pretendard Light" pitchFamily="34" charset="0"/>
+                <a:ea typeface="Pretendard Light" pitchFamily="34" charset="-122"/>
+                <a:cs typeface="Pretendard Light" pitchFamily="34" charset="-120"/>
               </a:rPr>
               <a:t>그 간지의 오행을 본다</a:t>
             </a:r>
@@ -13759,9 +13759,9 @@
                 <a:solidFill>
                   <a:srgbClr val="0C0A09"/>
                 </a:solidFill>
-                <a:latin typeface="paybooc OTF" pitchFamily="34" charset="0"/>
-                <a:ea typeface="paybooc OTF" pitchFamily="34" charset="-122"/>
-                <a:cs typeface="paybooc OTF" pitchFamily="34" charset="-120"/>
+                <a:latin typeface="Pretendard Light" pitchFamily="34" charset="0"/>
+                <a:ea typeface="Pretendard Light" pitchFamily="34" charset="-122"/>
+                <a:cs typeface="Pretendard Light" pitchFamily="34" charset="-120"/>
               </a:rPr>
               <a:t>수수 사주교육</a:t>
             </a:r>
@@ -13797,9 +13797,9 @@
                 <a:solidFill>
                   <a:srgbClr val="777169"/>
                 </a:solidFill>
-                <a:latin typeface="paybooc OTF" pitchFamily="34" charset="0"/>
-                <a:ea typeface="paybooc OTF" pitchFamily="34" charset="-122"/>
-                <a:cs typeface="paybooc OTF" pitchFamily="34" charset="-120"/>
+                <a:latin typeface="Pretendard Light" pitchFamily="34" charset="0"/>
+                <a:ea typeface="Pretendard Light" pitchFamily="34" charset="-122"/>
+                <a:cs typeface="Pretendard Light" pitchFamily="34" charset="-120"/>
               </a:rPr>
               <a:t>04</a:t>
             </a:r>
@@ -13835,9 +13835,9 @@
                 <a:solidFill>
                   <a:srgbClr val="777169"/>
                 </a:solidFill>
-                <a:latin typeface="paybooc OTF" pitchFamily="34" charset="0"/>
-                <a:ea typeface="paybooc OTF" pitchFamily="34" charset="-122"/>
-                <a:cs typeface="paybooc OTF" pitchFamily="34" charset="-120"/>
+                <a:latin typeface="Pretendard Light" pitchFamily="34" charset="0"/>
+                <a:ea typeface="Pretendard Light" pitchFamily="34" charset="-122"/>
+                <a:cs typeface="Pretendard Light" pitchFamily="34" charset="-120"/>
               </a:rPr>
               <a:t>04 · 만세력으로 직접 읽기</a:t>
             </a:r>
@@ -13911,9 +13911,9 @@
                 <a:solidFill>
                   <a:srgbClr val="777169"/>
                 </a:solidFill>
-                <a:latin typeface="paybooc OTF" pitchFamily="34" charset="0"/>
-                <a:ea typeface="paybooc OTF" pitchFamily="34" charset="-122"/>
-                <a:cs typeface="paybooc OTF" pitchFamily="34" charset="-120"/>
+                <a:latin typeface="Pretendard Light" pitchFamily="34" charset="0"/>
+                <a:ea typeface="Pretendard Light" pitchFamily="34" charset="-122"/>
+                <a:cs typeface="Pretendard Light" pitchFamily="34" charset="-120"/>
               </a:rPr>
               <a:t>올해가 나에게 어떤 해인지</a:t>
             </a:r>
@@ -14043,9 +14043,9 @@
                 <a:solidFill>
                   <a:srgbClr val="0C0A09"/>
                 </a:solidFill>
-                <a:latin typeface="paybooc OTF" pitchFamily="34" charset="0"/>
-                <a:ea typeface="paybooc OTF" pitchFamily="34" charset="-122"/>
-                <a:cs typeface="paybooc OTF" pitchFamily="34" charset="-120"/>
+                <a:latin typeface="Pretendard Light" pitchFamily="34" charset="0"/>
+                <a:ea typeface="Pretendard Light" pitchFamily="34" charset="-122"/>
+                <a:cs typeface="Pretendard Light" pitchFamily="34" charset="-120"/>
               </a:rPr>
               <a:t>올해 간지를 확인한다</a:t>
             </a:r>
@@ -14216,9 +14216,9 @@
                 <a:solidFill>
                   <a:srgbClr val="0C0A09"/>
                 </a:solidFill>
-                <a:latin typeface="paybooc OTF" pitchFamily="34" charset="0"/>
-                <a:ea typeface="paybooc OTF" pitchFamily="34" charset="-122"/>
-                <a:cs typeface="paybooc OTF" pitchFamily="34" charset="-120"/>
+                <a:latin typeface="Pretendard Light" pitchFamily="34" charset="0"/>
+                <a:ea typeface="Pretendard Light" pitchFamily="34" charset="-122"/>
+                <a:cs typeface="Pretendard Light" pitchFamily="34" charset="-120"/>
               </a:rPr>
               <a:t>오행 성분을 본다</a:t>
             </a:r>
@@ -14389,9 +14389,9 @@
                 <a:solidFill>
                   <a:srgbClr val="0C0A09"/>
                 </a:solidFill>
-                <a:latin typeface="paybooc OTF" pitchFamily="34" charset="0"/>
-                <a:ea typeface="paybooc OTF" pitchFamily="34" charset="-122"/>
-                <a:cs typeface="paybooc OTF" pitchFamily="34" charset="-120"/>
+                <a:latin typeface="Pretendard Light" pitchFamily="34" charset="0"/>
+                <a:ea typeface="Pretendard Light" pitchFamily="34" charset="-122"/>
+                <a:cs typeface="Pretendard Light" pitchFamily="34" charset="-120"/>
               </a:rPr>
               <a:t>내 원국·대운과 대입한다</a:t>
             </a:r>
@@ -14622,9 +14622,9 @@
                 <a:solidFill>
                   <a:srgbClr val="0C0A09"/>
                 </a:solidFill>
-                <a:latin typeface="paybooc OTF" pitchFamily="34" charset="0"/>
-                <a:ea typeface="paybooc OTF" pitchFamily="34" charset="-122"/>
-                <a:cs typeface="paybooc OTF" pitchFamily="34" charset="-120"/>
+                <a:latin typeface="Pretendard Light" pitchFamily="34" charset="0"/>
+                <a:ea typeface="Pretendard Light" pitchFamily="34" charset="-122"/>
+                <a:cs typeface="Pretendard Light" pitchFamily="34" charset="-120"/>
               </a:rPr>
               <a:t>수수 사주교육</a:t>
             </a:r>
@@ -14660,9 +14660,9 @@
                 <a:solidFill>
                   <a:srgbClr val="777169"/>
                 </a:solidFill>
-                <a:latin typeface="paybooc OTF" pitchFamily="34" charset="0"/>
-                <a:ea typeface="paybooc OTF" pitchFamily="34" charset="-122"/>
-                <a:cs typeface="paybooc OTF" pitchFamily="34" charset="-120"/>
+                <a:latin typeface="Pretendard Light" pitchFamily="34" charset="0"/>
+                <a:ea typeface="Pretendard Light" pitchFamily="34" charset="-122"/>
+                <a:cs typeface="Pretendard Light" pitchFamily="34" charset="-120"/>
               </a:rPr>
               <a:t>04</a:t>
             </a:r>
@@ -14698,9 +14698,9 @@
                 <a:solidFill>
                   <a:srgbClr val="777169"/>
                 </a:solidFill>
-                <a:latin typeface="paybooc OTF" pitchFamily="34" charset="0"/>
-                <a:ea typeface="paybooc OTF" pitchFamily="34" charset="-122"/>
-                <a:cs typeface="paybooc OTF" pitchFamily="34" charset="-120"/>
+                <a:latin typeface="Pretendard Light" pitchFamily="34" charset="0"/>
+                <a:ea typeface="Pretendard Light" pitchFamily="34" charset="-122"/>
+                <a:cs typeface="Pretendard Light" pitchFamily="34" charset="-120"/>
               </a:rPr>
               <a:t>04 · 만세력으로 직접 읽기</a:t>
             </a:r>
@@ -14774,9 +14774,9 @@
                 <a:solidFill>
                   <a:srgbClr val="777169"/>
                 </a:solidFill>
-                <a:latin typeface="paybooc OTF" pitchFamily="34" charset="0"/>
-                <a:ea typeface="paybooc OTF" pitchFamily="34" charset="-122"/>
-                <a:cs typeface="paybooc OTF" pitchFamily="34" charset="-120"/>
+                <a:latin typeface="Pretendard Light" pitchFamily="34" charset="0"/>
+                <a:ea typeface="Pretendard Light" pitchFamily="34" charset="-122"/>
+                <a:cs typeface="Pretendard Light" pitchFamily="34" charset="-120"/>
               </a:rPr>
               <a:t>겨울에 태어난 庚金의 사례</a:t>
             </a:r>
@@ -14846,9 +14846,9 @@
                 <a:solidFill>
                   <a:srgbClr val="777169"/>
                 </a:solidFill>
-                <a:latin typeface="paybooc OTF" pitchFamily="34" charset="0"/>
-                <a:ea typeface="paybooc OTF" pitchFamily="34" charset="-122"/>
-                <a:cs typeface="paybooc OTF" pitchFamily="34" charset="-120"/>
+                <a:latin typeface="Pretendard Light" pitchFamily="34" charset="0"/>
+                <a:ea typeface="Pretendard Light" pitchFamily="34" charset="-122"/>
+                <a:cs typeface="Pretendard Light" pitchFamily="34" charset="-120"/>
               </a:rPr>
               <a:t>예시 명식</a:t>
             </a:r>
@@ -14959,9 +14959,9 @@
                 <a:solidFill>
                   <a:srgbClr val="777169"/>
                 </a:solidFill>
-                <a:latin typeface="paybooc OTF" pitchFamily="34" charset="0"/>
-                <a:ea typeface="paybooc OTF" pitchFamily="34" charset="-122"/>
-                <a:cs typeface="paybooc OTF" pitchFamily="34" charset="-120"/>
+                <a:latin typeface="Pretendard Light" pitchFamily="34" charset="0"/>
+                <a:ea typeface="Pretendard Light" pitchFamily="34" charset="-122"/>
+                <a:cs typeface="Pretendard Light" pitchFamily="34" charset="-120"/>
               </a:rPr>
               <a:t>원국</a:t>
             </a:r>
@@ -14997,9 +14997,9 @@
                 <a:solidFill>
                   <a:srgbClr val="0C0A09"/>
                 </a:solidFill>
-                <a:latin typeface="paybooc OTF" pitchFamily="34" charset="0"/>
-                <a:ea typeface="paybooc OTF" pitchFamily="34" charset="-122"/>
-                <a:cs typeface="paybooc OTF" pitchFamily="34" charset="-120"/>
+                <a:latin typeface="Pretendard Light" pitchFamily="34" charset="0"/>
+                <a:ea typeface="Pretendard Light" pitchFamily="34" charset="-122"/>
+                <a:cs typeface="Pretendard Light" pitchFamily="34" charset="-120"/>
               </a:rPr>
               <a:t>타고난 나</a:t>
             </a:r>
@@ -15110,9 +15110,9 @@
                 <a:solidFill>
                   <a:srgbClr val="777169"/>
                 </a:solidFill>
-                <a:latin typeface="paybooc OTF" pitchFamily="34" charset="0"/>
-                <a:ea typeface="paybooc OTF" pitchFamily="34" charset="-122"/>
-                <a:cs typeface="paybooc OTF" pitchFamily="34" charset="-120"/>
+                <a:latin typeface="Pretendard Light" pitchFamily="34" charset="0"/>
+                <a:ea typeface="Pretendard Light" pitchFamily="34" charset="-122"/>
+                <a:cs typeface="Pretendard Light" pitchFamily="34" charset="-120"/>
               </a:rPr>
               <a:t>대운</a:t>
             </a:r>
@@ -15148,9 +15148,9 @@
                 <a:solidFill>
                   <a:srgbClr val="0C0A09"/>
                 </a:solidFill>
-                <a:latin typeface="paybooc OTF" pitchFamily="34" charset="0"/>
-                <a:ea typeface="paybooc OTF" pitchFamily="34" charset="-122"/>
-                <a:cs typeface="paybooc OTF" pitchFamily="34" charset="-120"/>
+                <a:latin typeface="Pretendard Light" pitchFamily="34" charset="0"/>
+                <a:ea typeface="Pretendard Light" pitchFamily="34" charset="-122"/>
+                <a:cs typeface="Pretendard Light" pitchFamily="34" charset="-120"/>
               </a:rPr>
               <a:t>지금 대운</a:t>
             </a:r>
@@ -15261,9 +15261,9 @@
                 <a:solidFill>
                   <a:srgbClr val="777169"/>
                 </a:solidFill>
-                <a:latin typeface="paybooc OTF" pitchFamily="34" charset="0"/>
-                <a:ea typeface="paybooc OTF" pitchFamily="34" charset="-122"/>
-                <a:cs typeface="paybooc OTF" pitchFamily="34" charset="-120"/>
+                <a:latin typeface="Pretendard Light" pitchFamily="34" charset="0"/>
+                <a:ea typeface="Pretendard Light" pitchFamily="34" charset="-122"/>
+                <a:cs typeface="Pretendard Light" pitchFamily="34" charset="-120"/>
               </a:rPr>
               <a:t>세운</a:t>
             </a:r>
@@ -15299,9 +15299,9 @@
                 <a:solidFill>
                   <a:srgbClr val="0C0A09"/>
                 </a:solidFill>
-                <a:latin typeface="paybooc OTF" pitchFamily="34" charset="0"/>
-                <a:ea typeface="paybooc OTF" pitchFamily="34" charset="-122"/>
-                <a:cs typeface="paybooc OTF" pitchFamily="34" charset="-120"/>
+                <a:latin typeface="Pretendard Light" pitchFamily="34" charset="0"/>
+                <a:ea typeface="Pretendard Light" pitchFamily="34" charset="-122"/>
+                <a:cs typeface="Pretendard Light" pitchFamily="34" charset="-120"/>
               </a:rPr>
               <a:t>올해 세운</a:t>
             </a:r>
@@ -15614,9 +15614,9 @@
                 <a:solidFill>
                   <a:srgbClr val="0C0A09"/>
                 </a:solidFill>
-                <a:latin typeface="paybooc OTF" pitchFamily="34" charset="0"/>
-                <a:ea typeface="paybooc OTF" pitchFamily="34" charset="-122"/>
-                <a:cs typeface="paybooc OTF" pitchFamily="34" charset="-120"/>
+                <a:latin typeface="Pretendard Light" pitchFamily="34" charset="0"/>
+                <a:ea typeface="Pretendard Light" pitchFamily="34" charset="-122"/>
+                <a:cs typeface="Pretendard Light" pitchFamily="34" charset="-120"/>
               </a:rPr>
               <a:t>수수 사주교육</a:t>
             </a:r>
@@ -15652,9 +15652,9 @@
                 <a:solidFill>
                   <a:srgbClr val="777169"/>
                 </a:solidFill>
-                <a:latin typeface="paybooc OTF" pitchFamily="34" charset="0"/>
-                <a:ea typeface="paybooc OTF" pitchFamily="34" charset="-122"/>
-                <a:cs typeface="paybooc OTF" pitchFamily="34" charset="-120"/>
+                <a:latin typeface="Pretendard Light" pitchFamily="34" charset="0"/>
+                <a:ea typeface="Pretendard Light" pitchFamily="34" charset="-122"/>
+                <a:cs typeface="Pretendard Light" pitchFamily="34" charset="-120"/>
               </a:rPr>
               <a:t>SECTION 05</a:t>
             </a:r>
@@ -15690,9 +15690,9 @@
                 <a:solidFill>
                   <a:srgbClr val="777169"/>
                 </a:solidFill>
-                <a:latin typeface="paybooc OTF" pitchFamily="34" charset="0"/>
-                <a:ea typeface="paybooc OTF" pitchFamily="34" charset="-122"/>
-                <a:cs typeface="paybooc OTF" pitchFamily="34" charset="-120"/>
+                <a:latin typeface="Pretendard Light" pitchFamily="34" charset="0"/>
+                <a:ea typeface="Pretendard Light" pitchFamily="34" charset="-122"/>
+                <a:cs typeface="Pretendard Light" pitchFamily="34" charset="-120"/>
               </a:rPr>
               <a:t>SECTION 05</a:t>
             </a:r>
@@ -15766,9 +15766,9 @@
                 <a:solidFill>
                   <a:srgbClr val="A8A29E"/>
                 </a:solidFill>
-                <a:latin typeface="paybooc OTF" pitchFamily="34" charset="0"/>
-                <a:ea typeface="paybooc OTF" pitchFamily="34" charset="-122"/>
-                <a:cs typeface="paybooc OTF" pitchFamily="34" charset="-120"/>
+                <a:latin typeface="Pretendard Light" pitchFamily="34" charset="0"/>
+                <a:ea typeface="Pretendard Light" pitchFamily="34" charset="-122"/>
+                <a:cs typeface="Pretendard Light" pitchFamily="34" charset="-120"/>
               </a:rPr>
               <a:t>HOW LUCK MEETS THE CHART · 생극제화</a:t>
             </a:r>
@@ -15999,9 +15999,9 @@
                 <a:solidFill>
                   <a:srgbClr val="0C0A09"/>
                 </a:solidFill>
-                <a:latin typeface="paybooc OTF" pitchFamily="34" charset="0"/>
-                <a:ea typeface="paybooc OTF" pitchFamily="34" charset="-122"/>
-                <a:cs typeface="paybooc OTF" pitchFamily="34" charset="-120"/>
+                <a:latin typeface="Pretendard Light" pitchFamily="34" charset="0"/>
+                <a:ea typeface="Pretendard Light" pitchFamily="34" charset="-122"/>
+                <a:cs typeface="Pretendard Light" pitchFamily="34" charset="-120"/>
               </a:rPr>
               <a:t>수수 사주교육</a:t>
             </a:r>
@@ -16037,9 +16037,9 @@
                 <a:solidFill>
                   <a:srgbClr val="777169"/>
                 </a:solidFill>
-                <a:latin typeface="paybooc OTF" pitchFamily="34" charset="0"/>
-                <a:ea typeface="paybooc OTF" pitchFamily="34" charset="-122"/>
-                <a:cs typeface="paybooc OTF" pitchFamily="34" charset="-120"/>
+                <a:latin typeface="Pretendard Light" pitchFamily="34" charset="0"/>
+                <a:ea typeface="Pretendard Light" pitchFamily="34" charset="-122"/>
+                <a:cs typeface="Pretendard Light" pitchFamily="34" charset="-120"/>
               </a:rPr>
               <a:t>05</a:t>
             </a:r>
@@ -16075,9 +16075,9 @@
                 <a:solidFill>
                   <a:srgbClr val="777169"/>
                 </a:solidFill>
-                <a:latin typeface="paybooc OTF" pitchFamily="34" charset="0"/>
-                <a:ea typeface="paybooc OTF" pitchFamily="34" charset="-122"/>
-                <a:cs typeface="paybooc OTF" pitchFamily="34" charset="-120"/>
+                <a:latin typeface="Pretendard Light" pitchFamily="34" charset="0"/>
+                <a:ea typeface="Pretendard Light" pitchFamily="34" charset="-122"/>
+                <a:cs typeface="Pretendard Light" pitchFamily="34" charset="-120"/>
               </a:rPr>
               <a:t>05 · 운 해석의 기초</a:t>
             </a:r>
@@ -16151,9 +16151,9 @@
                 <a:solidFill>
                   <a:srgbClr val="777169"/>
                 </a:solidFill>
-                <a:latin typeface="paybooc OTF" pitchFamily="34" charset="0"/>
-                <a:ea typeface="paybooc OTF" pitchFamily="34" charset="-122"/>
-                <a:cs typeface="paybooc OTF" pitchFamily="34" charset="-120"/>
+                <a:latin typeface="Pretendard Light" pitchFamily="34" charset="0"/>
+                <a:ea typeface="Pretendard Light" pitchFamily="34" charset="-122"/>
+                <a:cs typeface="Pretendard Light" pitchFamily="34" charset="-120"/>
               </a:rPr>
               <a:t>오행이 서로 돕고 누르는 관계</a:t>
             </a:r>
@@ -16245,9 +16245,9 @@
                 <a:solidFill>
                   <a:srgbClr val="777169"/>
                 </a:solidFill>
-                <a:latin typeface="paybooc OTF" pitchFamily="34" charset="0"/>
-                <a:ea typeface="paybooc OTF" pitchFamily="34" charset="-122"/>
-                <a:cs typeface="paybooc OTF" pitchFamily="34" charset="-120"/>
+                <a:latin typeface="Pretendard Light" pitchFamily="34" charset="0"/>
+                <a:ea typeface="Pretendard Light" pitchFamily="34" charset="-122"/>
+                <a:cs typeface="Pretendard Light" pitchFamily="34" charset="-120"/>
               </a:rPr>
               <a:t>相生 · 상생</a:t>
             </a:r>
@@ -16283,9 +16283,9 @@
                 <a:solidFill>
                   <a:srgbClr val="0C0A09"/>
                 </a:solidFill>
-                <a:latin typeface="paybooc OTF" pitchFamily="34" charset="0"/>
-                <a:ea typeface="paybooc OTF" pitchFamily="34" charset="-122"/>
-                <a:cs typeface="paybooc OTF" pitchFamily="34" charset="-120"/>
+                <a:latin typeface="Pretendard Light" pitchFamily="34" charset="0"/>
+                <a:ea typeface="Pretendard Light" pitchFamily="34" charset="-122"/>
+                <a:cs typeface="Pretendard Light" pitchFamily="34" charset="-120"/>
               </a:rPr>
               <a:t>낳고 돕는다</a:t>
             </a:r>
@@ -16479,9 +16479,9 @@
                 <a:solidFill>
                   <a:srgbClr val="777169"/>
                 </a:solidFill>
-                <a:latin typeface="paybooc OTF" pitchFamily="34" charset="0"/>
-                <a:ea typeface="paybooc OTF" pitchFamily="34" charset="-122"/>
-                <a:cs typeface="paybooc OTF" pitchFamily="34" charset="-120"/>
+                <a:latin typeface="Pretendard Light" pitchFamily="34" charset="0"/>
+                <a:ea typeface="Pretendard Light" pitchFamily="34" charset="-122"/>
+                <a:cs typeface="Pretendard Light" pitchFamily="34" charset="-120"/>
               </a:rPr>
               <a:t>相剋 · 상극</a:t>
             </a:r>
@@ -16517,9 +16517,9 @@
                 <a:solidFill>
                   <a:srgbClr val="0C0A09"/>
                 </a:solidFill>
-                <a:latin typeface="paybooc OTF" pitchFamily="34" charset="0"/>
-                <a:ea typeface="paybooc OTF" pitchFamily="34" charset="-122"/>
-                <a:cs typeface="paybooc OTF" pitchFamily="34" charset="-120"/>
+                <a:latin typeface="Pretendard Light" pitchFamily="34" charset="0"/>
+                <a:ea typeface="Pretendard Light" pitchFamily="34" charset="-122"/>
+                <a:cs typeface="Pretendard Light" pitchFamily="34" charset="-120"/>
               </a:rPr>
               <a:t>누르고 통제</a:t>
             </a:r>
@@ -16691,9 +16691,9 @@
                 <a:solidFill>
                   <a:srgbClr val="777169"/>
                 </a:solidFill>
-                <a:latin typeface="paybooc OTF" pitchFamily="34" charset="0"/>
-                <a:ea typeface="paybooc OTF" pitchFamily="34" charset="-122"/>
-                <a:cs typeface="paybooc OTF" pitchFamily="34" charset="-120"/>
+                <a:latin typeface="Pretendard Light" pitchFamily="34" charset="0"/>
+                <a:ea typeface="Pretendard Light" pitchFamily="34" charset="-122"/>
+                <a:cs typeface="Pretendard Light" pitchFamily="34" charset="-120"/>
               </a:rPr>
               <a:t>운 해석</a:t>
             </a:r>
@@ -16924,9 +16924,9 @@
                 <a:solidFill>
                   <a:srgbClr val="0C0A09"/>
                 </a:solidFill>
-                <a:latin typeface="paybooc OTF" pitchFamily="34" charset="0"/>
-                <a:ea typeface="paybooc OTF" pitchFamily="34" charset="-122"/>
-                <a:cs typeface="paybooc OTF" pitchFamily="34" charset="-120"/>
+                <a:latin typeface="Pretendard Light" pitchFamily="34" charset="0"/>
+                <a:ea typeface="Pretendard Light" pitchFamily="34" charset="-122"/>
+                <a:cs typeface="Pretendard Light" pitchFamily="34" charset="-120"/>
               </a:rPr>
               <a:t>수수 사주교육</a:t>
             </a:r>
@@ -16962,9 +16962,9 @@
                 <a:solidFill>
                   <a:srgbClr val="777169"/>
                 </a:solidFill>
-                <a:latin typeface="paybooc OTF" pitchFamily="34" charset="0"/>
-                <a:ea typeface="paybooc OTF" pitchFamily="34" charset="-122"/>
-                <a:cs typeface="paybooc OTF" pitchFamily="34" charset="-120"/>
+                <a:latin typeface="Pretendard Light" pitchFamily="34" charset="0"/>
+                <a:ea typeface="Pretendard Light" pitchFamily="34" charset="-122"/>
+                <a:cs typeface="Pretendard Light" pitchFamily="34" charset="-120"/>
               </a:rPr>
               <a:t>05</a:t>
             </a:r>
@@ -17000,9 +17000,9 @@
                 <a:solidFill>
                   <a:srgbClr val="777169"/>
                 </a:solidFill>
-                <a:latin typeface="paybooc OTF" pitchFamily="34" charset="0"/>
-                <a:ea typeface="paybooc OTF" pitchFamily="34" charset="-122"/>
-                <a:cs typeface="paybooc OTF" pitchFamily="34" charset="-120"/>
+                <a:latin typeface="Pretendard Light" pitchFamily="34" charset="0"/>
+                <a:ea typeface="Pretendard Light" pitchFamily="34" charset="-122"/>
+                <a:cs typeface="Pretendard Light" pitchFamily="34" charset="-120"/>
               </a:rPr>
               <a:t>05 · 운 해석의 기초</a:t>
             </a:r>
@@ -17076,9 +17076,9 @@
                 <a:solidFill>
                   <a:srgbClr val="777169"/>
                 </a:solidFill>
-                <a:latin typeface="paybooc OTF" pitchFamily="34" charset="0"/>
-                <a:ea typeface="paybooc OTF" pitchFamily="34" charset="-122"/>
-                <a:cs typeface="paybooc OTF" pitchFamily="34" charset="-120"/>
+                <a:latin typeface="Pretendard Light" pitchFamily="34" charset="0"/>
+                <a:ea typeface="Pretendard Light" pitchFamily="34" charset="-122"/>
+                <a:cs typeface="Pretendard Light" pitchFamily="34" charset="-120"/>
               </a:rPr>
               <a:t>용신(用神)을 만나는 상승기</a:t>
             </a:r>
@@ -17148,9 +17148,9 @@
                 <a:solidFill>
                   <a:srgbClr val="777169"/>
                 </a:solidFill>
-                <a:latin typeface="paybooc OTF" pitchFamily="34" charset="0"/>
-                <a:ea typeface="paybooc OTF" pitchFamily="34" charset="-122"/>
-                <a:cs typeface="paybooc OTF" pitchFamily="34" charset="-120"/>
+                <a:latin typeface="Pretendard Light" pitchFamily="34" charset="0"/>
+                <a:ea typeface="Pretendard Light" pitchFamily="34" charset="-122"/>
+                <a:cs typeface="Pretendard Light" pitchFamily="34" charset="-120"/>
               </a:rPr>
               <a:t>원국</a:t>
             </a:r>
@@ -17265,9 +17265,9 @@
                 <a:solidFill>
                   <a:srgbClr val="A8A29E"/>
                 </a:solidFill>
-                <a:latin typeface="paybooc OTF" pitchFamily="34" charset="0"/>
-                <a:ea typeface="paybooc OTF" pitchFamily="34" charset="-122"/>
-                <a:cs typeface="paybooc OTF" pitchFamily="34" charset="-120"/>
+                <a:latin typeface="Pretendard Light" pitchFamily="34" charset="0"/>
+                <a:ea typeface="Pretendard Light" pitchFamily="34" charset="-122"/>
+                <a:cs typeface="Pretendard Light" pitchFamily="34" charset="-120"/>
               </a:rPr>
               <a:t>→</a:t>
             </a:r>
@@ -17337,9 +17337,9 @@
                 <a:solidFill>
                   <a:srgbClr val="777169"/>
                 </a:solidFill>
-                <a:latin typeface="paybooc OTF" pitchFamily="34" charset="0"/>
-                <a:ea typeface="paybooc OTF" pitchFamily="34" charset="-122"/>
-                <a:cs typeface="paybooc OTF" pitchFamily="34" charset="-120"/>
+                <a:latin typeface="Pretendard Light" pitchFamily="34" charset="0"/>
+                <a:ea typeface="Pretendard Light" pitchFamily="34" charset="-122"/>
+                <a:cs typeface="Pretendard Light" pitchFamily="34" charset="-120"/>
               </a:rPr>
               <a:t>운</a:t>
             </a:r>
@@ -17473,9 +17473,9 @@
                 <a:solidFill>
                   <a:srgbClr val="A8A29E"/>
                 </a:solidFill>
-                <a:latin typeface="paybooc OTF" pitchFamily="34" charset="0"/>
-                <a:ea typeface="paybooc OTF" pitchFamily="34" charset="-122"/>
-                <a:cs typeface="paybooc OTF" pitchFamily="34" charset="-120"/>
+                <a:latin typeface="Pretendard Light" pitchFamily="34" charset="0"/>
+                <a:ea typeface="Pretendard Light" pitchFamily="34" charset="-122"/>
+                <a:cs typeface="Pretendard Light" pitchFamily="34" charset="-120"/>
               </a:rPr>
               <a:t>→</a:t>
             </a:r>
@@ -17545,9 +17545,9 @@
                 <a:solidFill>
                   <a:srgbClr val="777169"/>
                 </a:solidFill>
-                <a:latin typeface="paybooc OTF" pitchFamily="34" charset="0"/>
-                <a:ea typeface="paybooc OTF" pitchFamily="34" charset="-122"/>
-                <a:cs typeface="paybooc OTF" pitchFamily="34" charset="-120"/>
+                <a:latin typeface="Pretendard Light" pitchFamily="34" charset="0"/>
+                <a:ea typeface="Pretendard Light" pitchFamily="34" charset="-122"/>
+                <a:cs typeface="Pretendard Light" pitchFamily="34" charset="-120"/>
               </a:rPr>
               <a:t>결과</a:t>
             </a:r>
@@ -17696,9 +17696,9 @@
                 <a:solidFill>
                   <a:srgbClr val="777169"/>
                 </a:solidFill>
-                <a:latin typeface="paybooc OTF" pitchFamily="34" charset="0"/>
-                <a:ea typeface="paybooc OTF" pitchFamily="34" charset="-122"/>
-                <a:cs typeface="paybooc OTF" pitchFamily="34" charset="-120"/>
+                <a:latin typeface="Pretendard Light" pitchFamily="34" charset="0"/>
+                <a:ea typeface="Pretendard Light" pitchFamily="34" charset="-122"/>
+                <a:cs typeface="Pretendard Light" pitchFamily="34" charset="-120"/>
               </a:rPr>
               <a:t>용신</a:t>
             </a:r>
@@ -17967,9 +17967,9 @@
                 <a:solidFill>
                   <a:srgbClr val="0C0A09"/>
                 </a:solidFill>
-                <a:latin typeface="paybooc OTF" pitchFamily="34" charset="0"/>
-                <a:ea typeface="paybooc OTF" pitchFamily="34" charset="-122"/>
-                <a:cs typeface="paybooc OTF" pitchFamily="34" charset="-120"/>
+                <a:latin typeface="Pretendard Light" pitchFamily="34" charset="0"/>
+                <a:ea typeface="Pretendard Light" pitchFamily="34" charset="-122"/>
+                <a:cs typeface="Pretendard Light" pitchFamily="34" charset="-120"/>
               </a:rPr>
               <a:t>수수 사주교육</a:t>
             </a:r>
@@ -18005,9 +18005,9 @@
                 <a:solidFill>
                   <a:srgbClr val="777169"/>
                 </a:solidFill>
-                <a:latin typeface="paybooc OTF" pitchFamily="34" charset="0"/>
-                <a:ea typeface="paybooc OTF" pitchFamily="34" charset="-122"/>
-                <a:cs typeface="paybooc OTF" pitchFamily="34" charset="-120"/>
+                <a:latin typeface="Pretendard Light" pitchFamily="34" charset="0"/>
+                <a:ea typeface="Pretendard Light" pitchFamily="34" charset="-122"/>
+                <a:cs typeface="Pretendard Light" pitchFamily="34" charset="-120"/>
               </a:rPr>
               <a:t>05</a:t>
             </a:r>
@@ -18043,9 +18043,9 @@
                 <a:solidFill>
                   <a:srgbClr val="777169"/>
                 </a:solidFill>
-                <a:latin typeface="paybooc OTF" pitchFamily="34" charset="0"/>
-                <a:ea typeface="paybooc OTF" pitchFamily="34" charset="-122"/>
-                <a:cs typeface="paybooc OTF" pitchFamily="34" charset="-120"/>
+                <a:latin typeface="Pretendard Light" pitchFamily="34" charset="0"/>
+                <a:ea typeface="Pretendard Light" pitchFamily="34" charset="-122"/>
+                <a:cs typeface="Pretendard Light" pitchFamily="34" charset="-120"/>
               </a:rPr>
               <a:t>05 · 운 해석의 기초</a:t>
             </a:r>
@@ -18119,9 +18119,9 @@
                 <a:solidFill>
                   <a:srgbClr val="777169"/>
                 </a:solidFill>
-                <a:latin typeface="paybooc OTF" pitchFamily="34" charset="0"/>
-                <a:ea typeface="paybooc OTF" pitchFamily="34" charset="-122"/>
-                <a:cs typeface="paybooc OTF" pitchFamily="34" charset="-120"/>
+                <a:latin typeface="Pretendard Light" pitchFamily="34" charset="0"/>
+                <a:ea typeface="Pretendard Light" pitchFamily="34" charset="-122"/>
+                <a:cs typeface="Pretendard Light" pitchFamily="34" charset="-120"/>
               </a:rPr>
               <a:t>기신(忌神) 시기 — 조심 구간</a:t>
             </a:r>
@@ -18191,9 +18191,9 @@
                 <a:solidFill>
                   <a:srgbClr val="777169"/>
                 </a:solidFill>
-                <a:latin typeface="paybooc OTF" pitchFamily="34" charset="0"/>
-                <a:ea typeface="paybooc OTF" pitchFamily="34" charset="-122"/>
-                <a:cs typeface="paybooc OTF" pitchFamily="34" charset="-120"/>
+                <a:latin typeface="Pretendard Light" pitchFamily="34" charset="0"/>
+                <a:ea typeface="Pretendard Light" pitchFamily="34" charset="-122"/>
+                <a:cs typeface="Pretendard Light" pitchFamily="34" charset="-120"/>
               </a:rPr>
               <a:t>원국</a:t>
             </a:r>
@@ -18308,9 +18308,9 @@
                 <a:solidFill>
                   <a:srgbClr val="A8A29E"/>
                 </a:solidFill>
-                <a:latin typeface="paybooc OTF" pitchFamily="34" charset="0"/>
-                <a:ea typeface="paybooc OTF" pitchFamily="34" charset="-122"/>
-                <a:cs typeface="paybooc OTF" pitchFamily="34" charset="-120"/>
+                <a:latin typeface="Pretendard Light" pitchFamily="34" charset="0"/>
+                <a:ea typeface="Pretendard Light" pitchFamily="34" charset="-122"/>
+                <a:cs typeface="Pretendard Light" pitchFamily="34" charset="-120"/>
               </a:rPr>
               <a:t>→</a:t>
             </a:r>
@@ -18380,9 +18380,9 @@
                 <a:solidFill>
                   <a:srgbClr val="777169"/>
                 </a:solidFill>
-                <a:latin typeface="paybooc OTF" pitchFamily="34" charset="0"/>
-                <a:ea typeface="paybooc OTF" pitchFamily="34" charset="-122"/>
-                <a:cs typeface="paybooc OTF" pitchFamily="34" charset="-120"/>
+                <a:latin typeface="Pretendard Light" pitchFamily="34" charset="0"/>
+                <a:ea typeface="Pretendard Light" pitchFamily="34" charset="-122"/>
+                <a:cs typeface="Pretendard Light" pitchFamily="34" charset="-120"/>
               </a:rPr>
               <a:t>운</a:t>
             </a:r>
@@ -18516,9 +18516,9 @@
                 <a:solidFill>
                   <a:srgbClr val="A8A29E"/>
                 </a:solidFill>
-                <a:latin typeface="paybooc OTF" pitchFamily="34" charset="0"/>
-                <a:ea typeface="paybooc OTF" pitchFamily="34" charset="-122"/>
-                <a:cs typeface="paybooc OTF" pitchFamily="34" charset="-120"/>
+                <a:latin typeface="Pretendard Light" pitchFamily="34" charset="0"/>
+                <a:ea typeface="Pretendard Light" pitchFamily="34" charset="-122"/>
+                <a:cs typeface="Pretendard Light" pitchFamily="34" charset="-120"/>
               </a:rPr>
               <a:t>→</a:t>
             </a:r>
@@ -18588,9 +18588,9 @@
                 <a:solidFill>
                   <a:srgbClr val="777169"/>
                 </a:solidFill>
-                <a:latin typeface="paybooc OTF" pitchFamily="34" charset="0"/>
-                <a:ea typeface="paybooc OTF" pitchFamily="34" charset="-122"/>
-                <a:cs typeface="paybooc OTF" pitchFamily="34" charset="-120"/>
+                <a:latin typeface="Pretendard Light" pitchFamily="34" charset="0"/>
+                <a:ea typeface="Pretendard Light" pitchFamily="34" charset="-122"/>
+                <a:cs typeface="Pretendard Light" pitchFamily="34" charset="-120"/>
               </a:rPr>
               <a:t>결과</a:t>
             </a:r>
@@ -18739,9 +18739,9 @@
                 <a:solidFill>
                   <a:srgbClr val="DC2626"/>
                 </a:solidFill>
-                <a:latin typeface="paybooc OTF" pitchFamily="34" charset="0"/>
-                <a:ea typeface="paybooc OTF" pitchFamily="34" charset="-122"/>
-                <a:cs typeface="paybooc OTF" pitchFamily="34" charset="-120"/>
+                <a:latin typeface="Pretendard Light" pitchFamily="34" charset="0"/>
+                <a:ea typeface="Pretendard Light" pitchFamily="34" charset="-122"/>
+                <a:cs typeface="Pretendard Light" pitchFamily="34" charset="-120"/>
               </a:rPr>
               <a:t>주의</a:t>
             </a:r>
@@ -19032,9 +19032,9 @@
                 <a:solidFill>
                   <a:srgbClr val="0C0A09"/>
                 </a:solidFill>
-                <a:latin typeface="paybooc OTF" pitchFamily="34" charset="0"/>
-                <a:ea typeface="paybooc OTF" pitchFamily="34" charset="-122"/>
-                <a:cs typeface="paybooc OTF" pitchFamily="34" charset="-120"/>
+                <a:latin typeface="Pretendard Light" pitchFamily="34" charset="0"/>
+                <a:ea typeface="Pretendard Light" pitchFamily="34" charset="-122"/>
+                <a:cs typeface="Pretendard Light" pitchFamily="34" charset="-120"/>
               </a:rPr>
               <a:t>수수 사주교육</a:t>
             </a:r>
@@ -19070,9 +19070,9 @@
                 <a:solidFill>
                   <a:srgbClr val="777169"/>
                 </a:solidFill>
-                <a:latin typeface="paybooc OTF" pitchFamily="34" charset="0"/>
-                <a:ea typeface="paybooc OTF" pitchFamily="34" charset="-122"/>
-                <a:cs typeface="paybooc OTF" pitchFamily="34" charset="-120"/>
+                <a:latin typeface="Pretendard Light" pitchFamily="34" charset="0"/>
+                <a:ea typeface="Pretendard Light" pitchFamily="34" charset="-122"/>
+                <a:cs typeface="Pretendard Light" pitchFamily="34" charset="-120"/>
               </a:rPr>
               <a:t>05</a:t>
             </a:r>
@@ -19108,9 +19108,9 @@
                 <a:solidFill>
                   <a:srgbClr val="777169"/>
                 </a:solidFill>
-                <a:latin typeface="paybooc OTF" pitchFamily="34" charset="0"/>
-                <a:ea typeface="paybooc OTF" pitchFamily="34" charset="-122"/>
-                <a:cs typeface="paybooc OTF" pitchFamily="34" charset="-120"/>
+                <a:latin typeface="Pretendard Light" pitchFamily="34" charset="0"/>
+                <a:ea typeface="Pretendard Light" pitchFamily="34" charset="-122"/>
+                <a:cs typeface="Pretendard Light" pitchFamily="34" charset="-120"/>
               </a:rPr>
               <a:t>05 · 운 해석의 기초</a:t>
             </a:r>
@@ -19184,9 +19184,9 @@
                 <a:solidFill>
                   <a:srgbClr val="777169"/>
                 </a:solidFill>
-                <a:latin typeface="paybooc OTF" pitchFamily="34" charset="0"/>
-                <a:ea typeface="paybooc OTF" pitchFamily="34" charset="-122"/>
-                <a:cs typeface="paybooc OTF" pitchFamily="34" charset="-120"/>
+                <a:latin typeface="Pretendard Light" pitchFamily="34" charset="0"/>
+                <a:ea typeface="Pretendard Light" pitchFamily="34" charset="-122"/>
+                <a:cs typeface="Pretendard Light" pitchFamily="34" charset="-120"/>
               </a:rPr>
               <a:t>이 순서로 보면 흔들리지 않는다</a:t>
             </a:r>
@@ -19316,9 +19316,9 @@
                 <a:solidFill>
                   <a:srgbClr val="0C0A09"/>
                 </a:solidFill>
-                <a:latin typeface="paybooc OTF" pitchFamily="34" charset="0"/>
-                <a:ea typeface="paybooc OTF" pitchFamily="34" charset="-122"/>
-                <a:cs typeface="paybooc OTF" pitchFamily="34" charset="-120"/>
+                <a:latin typeface="Pretendard Light" pitchFamily="34" charset="0"/>
+                <a:ea typeface="Pretendard Light" pitchFamily="34" charset="-122"/>
+                <a:cs typeface="Pretendard Light" pitchFamily="34" charset="-120"/>
               </a:rPr>
               <a:t>원국 파악</a:t>
             </a:r>
@@ -19489,9 +19489,9 @@
                 <a:solidFill>
                   <a:srgbClr val="0C0A09"/>
                 </a:solidFill>
-                <a:latin typeface="paybooc OTF" pitchFamily="34" charset="0"/>
-                <a:ea typeface="paybooc OTF" pitchFamily="34" charset="-122"/>
-                <a:cs typeface="paybooc OTF" pitchFamily="34" charset="-120"/>
+                <a:latin typeface="Pretendard Light" pitchFamily="34" charset="0"/>
+                <a:ea typeface="Pretendard Light" pitchFamily="34" charset="-122"/>
+                <a:cs typeface="Pretendard Light" pitchFamily="34" charset="-120"/>
               </a:rPr>
               <a:t>필요 오행</a:t>
             </a:r>
@@ -19662,9 +19662,9 @@
                 <a:solidFill>
                   <a:srgbClr val="0C0A09"/>
                 </a:solidFill>
-                <a:latin typeface="paybooc OTF" pitchFamily="34" charset="0"/>
-                <a:ea typeface="paybooc OTF" pitchFamily="34" charset="-122"/>
-                <a:cs typeface="paybooc OTF" pitchFamily="34" charset="-120"/>
+                <a:latin typeface="Pretendard Light" pitchFamily="34" charset="0"/>
+                <a:ea typeface="Pretendard Light" pitchFamily="34" charset="-122"/>
+                <a:cs typeface="Pretendard Light" pitchFamily="34" charset="-120"/>
               </a:rPr>
               <a:t>운 글자 대입</a:t>
             </a:r>
@@ -19835,9 +19835,9 @@
                 <a:solidFill>
                   <a:srgbClr val="0C0A09"/>
                 </a:solidFill>
-                <a:latin typeface="paybooc OTF" pitchFamily="34" charset="0"/>
-                <a:ea typeface="paybooc OTF" pitchFamily="34" charset="-122"/>
-                <a:cs typeface="paybooc OTF" pitchFamily="34" charset="-120"/>
+                <a:latin typeface="Pretendard Light" pitchFamily="34" charset="0"/>
+                <a:ea typeface="Pretendard Light" pitchFamily="34" charset="-122"/>
+                <a:cs typeface="Pretendard Light" pitchFamily="34" charset="-120"/>
               </a:rPr>
               <a:t>길흉 판단</a:t>
             </a:r>
@@ -19948,9 +19948,9 @@
                 <a:solidFill>
                   <a:srgbClr val="777169"/>
                 </a:solidFill>
-                <a:latin typeface="paybooc OTF" pitchFamily="34" charset="0"/>
-                <a:ea typeface="paybooc OTF" pitchFamily="34" charset="-122"/>
-                <a:cs typeface="paybooc OTF" pitchFamily="34" charset="-120"/>
+                <a:latin typeface="Pretendard Light" pitchFamily="34" charset="0"/>
+                <a:ea typeface="Pretendard Light" pitchFamily="34" charset="-122"/>
+                <a:cs typeface="Pretendard Light" pitchFamily="34" charset="-120"/>
               </a:rPr>
               <a:t>습관</a:t>
             </a:r>
@@ -20181,9 +20181,9 @@
                 <a:solidFill>
                   <a:srgbClr val="0C0A09"/>
                 </a:solidFill>
-                <a:latin typeface="paybooc OTF" pitchFamily="34" charset="0"/>
-                <a:ea typeface="paybooc OTF" pitchFamily="34" charset="-122"/>
-                <a:cs typeface="paybooc OTF" pitchFamily="34" charset="-120"/>
+                <a:latin typeface="Pretendard Light" pitchFamily="34" charset="0"/>
+                <a:ea typeface="Pretendard Light" pitchFamily="34" charset="-122"/>
+                <a:cs typeface="Pretendard Light" pitchFamily="34" charset="-120"/>
               </a:rPr>
               <a:t>수수 사주교육</a:t>
             </a:r>
@@ -20219,9 +20219,9 @@
                 <a:solidFill>
                   <a:srgbClr val="777169"/>
                 </a:solidFill>
-                <a:latin typeface="paybooc OTF" pitchFamily="34" charset="0"/>
-                <a:ea typeface="paybooc OTF" pitchFamily="34" charset="-122"/>
-                <a:cs typeface="paybooc OTF" pitchFamily="34" charset="-120"/>
+                <a:latin typeface="Pretendard Light" pitchFamily="34" charset="0"/>
+                <a:ea typeface="Pretendard Light" pitchFamily="34" charset="-122"/>
+                <a:cs typeface="Pretendard Light" pitchFamily="34" charset="-120"/>
               </a:rPr>
               <a:t>REVIEW</a:t>
             </a:r>
@@ -20257,9 +20257,9 @@
                 <a:solidFill>
                   <a:srgbClr val="777169"/>
                 </a:solidFill>
-                <a:latin typeface="paybooc OTF" pitchFamily="34" charset="0"/>
-                <a:ea typeface="paybooc OTF" pitchFamily="34" charset="-122"/>
-                <a:cs typeface="paybooc OTF" pitchFamily="34" charset="-120"/>
+                <a:latin typeface="Pretendard Light" pitchFamily="34" charset="0"/>
+                <a:ea typeface="Pretendard Light" pitchFamily="34" charset="-122"/>
+                <a:cs typeface="Pretendard Light" pitchFamily="34" charset="-120"/>
               </a:rPr>
               <a:t>WRAP-UP</a:t>
             </a:r>
@@ -20333,9 +20333,9 @@
                 <a:solidFill>
                   <a:srgbClr val="777169"/>
                 </a:solidFill>
-                <a:latin typeface="paybooc OTF" pitchFamily="34" charset="0"/>
-                <a:ea typeface="paybooc OTF" pitchFamily="34" charset="-122"/>
-                <a:cs typeface="paybooc OTF" pitchFamily="34" charset="-120"/>
+                <a:latin typeface="Pretendard Light" pitchFamily="34" charset="0"/>
+                <a:ea typeface="Pretendard Light" pitchFamily="34" charset="-122"/>
+                <a:cs typeface="Pretendard Light" pitchFamily="34" charset="-120"/>
               </a:rPr>
               <a:t>오늘 꼭 챙길 다섯 가지</a:t>
             </a:r>
@@ -20431,9 +20431,9 @@
                 <a:solidFill>
                   <a:srgbClr val="0C0A09"/>
                 </a:solidFill>
-                <a:latin typeface="paybooc OTF" pitchFamily="34" charset="0"/>
-                <a:ea typeface="paybooc OTF" pitchFamily="34" charset="-122"/>
-                <a:cs typeface="paybooc OTF" pitchFamily="34" charset="-120"/>
+                <a:latin typeface="Pretendard Light" pitchFamily="34" charset="0"/>
+                <a:ea typeface="Pretendard Light" pitchFamily="34" charset="-122"/>
+                <a:cs typeface="Pretendard Light" pitchFamily="34" charset="-120"/>
               </a:rPr>
               <a:t>원국은 “차”, 운은 “길”</a:t>
             </a:r>
@@ -20590,9 +20590,9 @@
                 <a:solidFill>
                   <a:srgbClr val="0C0A09"/>
                 </a:solidFill>
-                <a:latin typeface="paybooc OTF" pitchFamily="34" charset="0"/>
-                <a:ea typeface="paybooc OTF" pitchFamily="34" charset="-122"/>
-                <a:cs typeface="paybooc OTF" pitchFamily="34" charset="-120"/>
+                <a:latin typeface="Pretendard Light" pitchFamily="34" charset="0"/>
+                <a:ea typeface="Pretendard Light" pitchFamily="34" charset="-122"/>
+                <a:cs typeface="Pretendard Light" pitchFamily="34" charset="-120"/>
               </a:rPr>
               <a:t>대운 = 10년 단위 큰 환경</a:t>
             </a:r>
@@ -20749,9 +20749,9 @@
                 <a:solidFill>
                   <a:srgbClr val="0C0A09"/>
                 </a:solidFill>
-                <a:latin typeface="paybooc OTF" pitchFamily="34" charset="0"/>
-                <a:ea typeface="paybooc OTF" pitchFamily="34" charset="-122"/>
-                <a:cs typeface="paybooc OTF" pitchFamily="34" charset="-120"/>
+                <a:latin typeface="Pretendard Light" pitchFamily="34" charset="0"/>
+                <a:ea typeface="Pretendard Light" pitchFamily="34" charset="-122"/>
+                <a:cs typeface="Pretendard Light" pitchFamily="34" charset="-120"/>
               </a:rPr>
               <a:t>세운 = 1년 단위 그해 사건</a:t>
             </a:r>
@@ -20908,9 +20908,9 @@
                 <a:solidFill>
                   <a:srgbClr val="0C0A09"/>
                 </a:solidFill>
-                <a:latin typeface="paybooc OTF" pitchFamily="34" charset="0"/>
-                <a:ea typeface="paybooc OTF" pitchFamily="34" charset="-122"/>
-                <a:cs typeface="paybooc OTF" pitchFamily="34" charset="-120"/>
+                <a:latin typeface="Pretendard Light" pitchFamily="34" charset="0"/>
+                <a:ea typeface="Pretendard Light" pitchFamily="34" charset="-122"/>
+                <a:cs typeface="Pretendard Light" pitchFamily="34" charset="-120"/>
               </a:rPr>
               <a:t>만세력은 대운수→대운→세운 순</a:t>
             </a:r>
@@ -21067,9 +21067,9 @@
                 <a:solidFill>
                   <a:srgbClr val="0C0A09"/>
                 </a:solidFill>
-                <a:latin typeface="paybooc OTF" pitchFamily="34" charset="0"/>
-                <a:ea typeface="paybooc OTF" pitchFamily="34" charset="-122"/>
-                <a:cs typeface="paybooc OTF" pitchFamily="34" charset="-120"/>
+                <a:latin typeface="Pretendard Light" pitchFamily="34" charset="0"/>
+                <a:ea typeface="Pretendard Light" pitchFamily="34" charset="-122"/>
+                <a:cs typeface="Pretendard Light" pitchFamily="34" charset="-120"/>
               </a:rPr>
               <a:t>필요오행이면 순풍, 부담이면 역풍</a:t>
             </a:r>
@@ -21319,9 +21319,9 @@
                 <a:solidFill>
                   <a:srgbClr val="0C0A09"/>
                 </a:solidFill>
-                <a:latin typeface="paybooc OTF" pitchFamily="34" charset="0"/>
-                <a:ea typeface="paybooc OTF" pitchFamily="34" charset="-122"/>
-                <a:cs typeface="paybooc OTF" pitchFamily="34" charset="-120"/>
+                <a:latin typeface="Pretendard Light" pitchFamily="34" charset="0"/>
+                <a:ea typeface="Pretendard Light" pitchFamily="34" charset="-122"/>
+                <a:cs typeface="Pretendard Light" pitchFamily="34" charset="-120"/>
               </a:rPr>
               <a:t>수수 사주교육</a:t>
             </a:r>
@@ -21357,9 +21357,9 @@
                 <a:solidFill>
                   <a:srgbClr val="777169"/>
                 </a:solidFill>
-                <a:latin typeface="paybooc OTF" pitchFamily="34" charset="0"/>
-                <a:ea typeface="paybooc OTF" pitchFamily="34" charset="-122"/>
-                <a:cs typeface="paybooc OTF" pitchFamily="34" charset="-120"/>
+                <a:latin typeface="Pretendard Light" pitchFamily="34" charset="0"/>
+                <a:ea typeface="Pretendard Light" pitchFamily="34" charset="-122"/>
+                <a:cs typeface="Pretendard Light" pitchFamily="34" charset="-120"/>
               </a:rPr>
               <a:t>GOALS</a:t>
             </a:r>
@@ -21395,9 +21395,9 @@
                 <a:solidFill>
                   <a:srgbClr val="777169"/>
                 </a:solidFill>
-                <a:latin typeface="paybooc OTF" pitchFamily="34" charset="0"/>
-                <a:ea typeface="paybooc OTF" pitchFamily="34" charset="-122"/>
-                <a:cs typeface="paybooc OTF" pitchFamily="34" charset="-120"/>
+                <a:latin typeface="Pretendard Light" pitchFamily="34" charset="0"/>
+                <a:ea typeface="Pretendard Light" pitchFamily="34" charset="-122"/>
+                <a:cs typeface="Pretendard Light" pitchFamily="34" charset="-120"/>
               </a:rPr>
               <a:t>LEARNING GOALS</a:t>
             </a:r>
@@ -21471,9 +21471,9 @@
                 <a:solidFill>
                   <a:srgbClr val="777169"/>
                 </a:solidFill>
-                <a:latin typeface="paybooc OTF" pitchFamily="34" charset="0"/>
-                <a:ea typeface="paybooc OTF" pitchFamily="34" charset="-122"/>
-                <a:cs typeface="paybooc OTF" pitchFamily="34" charset="-120"/>
+                <a:latin typeface="Pretendard Light" pitchFamily="34" charset="0"/>
+                <a:ea typeface="Pretendard Light" pitchFamily="34" charset="-122"/>
+                <a:cs typeface="Pretendard Light" pitchFamily="34" charset="-120"/>
               </a:rPr>
               <a:t>끝나면 이 세 가지를 할 수 있습니다</a:t>
             </a:r>
@@ -21603,9 +21603,9 @@
                 <a:solidFill>
                   <a:srgbClr val="0C0A09"/>
                 </a:solidFill>
-                <a:latin typeface="paybooc OTF" pitchFamily="34" charset="0"/>
-                <a:ea typeface="paybooc OTF" pitchFamily="34" charset="-122"/>
-                <a:cs typeface="paybooc OTF" pitchFamily="34" charset="-120"/>
+                <a:latin typeface="Pretendard Light" pitchFamily="34" charset="0"/>
+                <a:ea typeface="Pretendard Light" pitchFamily="34" charset="-122"/>
+                <a:cs typeface="Pretendard Light" pitchFamily="34" charset="-120"/>
               </a:rPr>
               <a:t>운의 관점 잡기</a:t>
             </a:r>
@@ -21776,9 +21776,9 @@
                 <a:solidFill>
                   <a:srgbClr val="0C0A09"/>
                 </a:solidFill>
-                <a:latin typeface="paybooc OTF" pitchFamily="34" charset="0"/>
-                <a:ea typeface="paybooc OTF" pitchFamily="34" charset="-122"/>
-                <a:cs typeface="paybooc OTF" pitchFamily="34" charset="-120"/>
+                <a:latin typeface="Pretendard Light" pitchFamily="34" charset="0"/>
+                <a:ea typeface="Pretendard Light" pitchFamily="34" charset="-122"/>
+                <a:cs typeface="Pretendard Light" pitchFamily="34" charset="-120"/>
               </a:rPr>
               <a:t>대운·세운 구분</a:t>
             </a:r>
@@ -21949,9 +21949,9 @@
                 <a:solidFill>
                   <a:srgbClr val="0C0A09"/>
                 </a:solidFill>
-                <a:latin typeface="paybooc OTF" pitchFamily="34" charset="0"/>
-                <a:ea typeface="paybooc OTF" pitchFamily="34" charset="-122"/>
-                <a:cs typeface="paybooc OTF" pitchFamily="34" charset="-120"/>
+                <a:latin typeface="Pretendard Light" pitchFamily="34" charset="0"/>
+                <a:ea typeface="Pretendard Light" pitchFamily="34" charset="-122"/>
+                <a:cs typeface="Pretendard Light" pitchFamily="34" charset="-120"/>
               </a:rPr>
               <a:t>만세력 판독</a:t>
             </a:r>
@@ -22062,9 +22062,9 @@
                 <a:solidFill>
                   <a:srgbClr val="777169"/>
                 </a:solidFill>
-                <a:latin typeface="paybooc OTF" pitchFamily="34" charset="0"/>
-                <a:ea typeface="paybooc OTF" pitchFamily="34" charset="-122"/>
-                <a:cs typeface="paybooc OTF" pitchFamily="34" charset="-120"/>
+                <a:latin typeface="Pretendard Light" pitchFamily="34" charset="0"/>
+                <a:ea typeface="Pretendard Light" pitchFamily="34" charset="-122"/>
+                <a:cs typeface="Pretendard Light" pitchFamily="34" charset="-120"/>
               </a:rPr>
               <a:t>한 줄 요약</a:t>
             </a:r>
@@ -22339,9 +22339,9 @@
                 <a:solidFill>
                   <a:srgbClr val="FFFFFF"/>
                 </a:solidFill>
-                <a:latin typeface="paybooc OTF" pitchFamily="34" charset="0"/>
-                <a:ea typeface="paybooc OTF" pitchFamily="34" charset="-122"/>
-                <a:cs typeface="paybooc OTF" pitchFamily="34" charset="-120"/>
+                <a:latin typeface="Pretendard Light" pitchFamily="34" charset="0"/>
+                <a:ea typeface="Pretendard Light" pitchFamily="34" charset="-122"/>
+                <a:cs typeface="Pretendard Light" pitchFamily="34" charset="-120"/>
               </a:rPr>
               <a:t>수수 사주교육</a:t>
             </a:r>
@@ -22377,9 +22377,9 @@
                 <a:solidFill>
                   <a:srgbClr val="A8A29E"/>
                 </a:solidFill>
-                <a:latin typeface="paybooc OTF" pitchFamily="34" charset="0"/>
-                <a:ea typeface="paybooc OTF" pitchFamily="34" charset="-122"/>
-                <a:cs typeface="paybooc OTF" pitchFamily="34" charset="-120"/>
+                <a:latin typeface="Pretendard Light" pitchFamily="34" charset="0"/>
+                <a:ea typeface="Pretendard Light" pitchFamily="34" charset="-122"/>
+                <a:cs typeface="Pretendard Light" pitchFamily="34" charset="-120"/>
               </a:rPr>
               <a:t>NEXT SESSION</a:t>
             </a:r>
@@ -22415,9 +22415,9 @@
                 <a:solidFill>
                   <a:srgbClr val="A7E5D3"/>
                 </a:solidFill>
-                <a:latin typeface="paybooc OTF" pitchFamily="34" charset="0"/>
-                <a:ea typeface="paybooc OTF" pitchFamily="34" charset="-122"/>
-                <a:cs typeface="paybooc OTF" pitchFamily="34" charset="-120"/>
+                <a:latin typeface="Pretendard Light" pitchFamily="34" charset="0"/>
+                <a:ea typeface="Pretendard Light" pitchFamily="34" charset="-122"/>
+                <a:cs typeface="Pretendard Light" pitchFamily="34" charset="-120"/>
               </a:rPr>
               <a:t>다음 시간</a:t>
             </a:r>
@@ -22491,9 +22491,9 @@
                 <a:solidFill>
                   <a:srgbClr val="A8A29E"/>
                 </a:solidFill>
-                <a:latin typeface="paybooc OTF" pitchFamily="34" charset="0"/>
-                <a:ea typeface="paybooc OTF" pitchFamily="34" charset="-122"/>
-                <a:cs typeface="paybooc OTF" pitchFamily="34" charset="-120"/>
+                <a:latin typeface="Pretendard Light" pitchFamily="34" charset="0"/>
+                <a:ea typeface="Pretendard Light" pitchFamily="34" charset="-122"/>
+                <a:cs typeface="Pretendard Light" pitchFamily="34" charset="-120"/>
               </a:rPr>
               <a:t>오늘 읽은 대운·세운 위에, 용신(用神)으로 길흉을 더 정교하게</a:t>
             </a:r>
@@ -22594,9 +22594,9 @@
                 <a:solidFill>
                   <a:srgbClr val="FFFFFF"/>
                 </a:solidFill>
-                <a:latin typeface="paybooc OTF" pitchFamily="34" charset="0"/>
-                <a:ea typeface="paybooc OTF" pitchFamily="34" charset="-122"/>
-                <a:cs typeface="paybooc OTF" pitchFamily="34" charset="-120"/>
+                <a:latin typeface="Pretendard Light" pitchFamily="34" charset="0"/>
+                <a:ea typeface="Pretendard Light" pitchFamily="34" charset="-122"/>
+                <a:cs typeface="Pretendard Light" pitchFamily="34" charset="-120"/>
               </a:rPr>
               <a:t>용신·희신·기신</a:t>
             </a:r>
@@ -22735,9 +22735,9 @@
                 <a:solidFill>
                   <a:srgbClr val="FFFFFF"/>
                 </a:solidFill>
-                <a:latin typeface="paybooc OTF" pitchFamily="34" charset="0"/>
-                <a:ea typeface="paybooc OTF" pitchFamily="34" charset="-122"/>
-                <a:cs typeface="paybooc OTF" pitchFamily="34" charset="-120"/>
+                <a:latin typeface="Pretendard Light" pitchFamily="34" charset="0"/>
+                <a:ea typeface="Pretendard Light" pitchFamily="34" charset="-122"/>
+                <a:cs typeface="Pretendard Light" pitchFamily="34" charset="-120"/>
               </a:rPr>
               <a:t>십신(十神)으로 보는 사건</a:t>
             </a:r>
@@ -22876,9 +22876,9 @@
                 <a:solidFill>
                   <a:srgbClr val="FFFFFF"/>
                 </a:solidFill>
-                <a:latin typeface="paybooc OTF" pitchFamily="34" charset="0"/>
-                <a:ea typeface="paybooc OTF" pitchFamily="34" charset="-122"/>
-                <a:cs typeface="paybooc OTF" pitchFamily="34" charset="-120"/>
+                <a:latin typeface="Pretendard Light" pitchFamily="34" charset="0"/>
+                <a:ea typeface="Pretendard Light" pitchFamily="34" charset="-122"/>
+                <a:cs typeface="Pretendard Light" pitchFamily="34" charset="-120"/>
               </a:rPr>
               <a:t>합·충·형</a:t>
             </a:r>
@@ -23106,9 +23106,9 @@
                 <a:solidFill>
                   <a:srgbClr val="0C0A09"/>
                 </a:solidFill>
-                <a:latin typeface="paybooc OTF" pitchFamily="34" charset="0"/>
-                <a:ea typeface="paybooc OTF" pitchFamily="34" charset="-122"/>
-                <a:cs typeface="paybooc OTF" pitchFamily="34" charset="-120"/>
+                <a:latin typeface="Pretendard Light" pitchFamily="34" charset="0"/>
+                <a:ea typeface="Pretendard Light" pitchFamily="34" charset="-122"/>
+                <a:cs typeface="Pretendard Light" pitchFamily="34" charset="-120"/>
               </a:rPr>
               <a:t>수수 사주교육</a:t>
             </a:r>
@@ -23144,9 +23144,9 @@
                 <a:solidFill>
                   <a:srgbClr val="777169"/>
                 </a:solidFill>
-                <a:latin typeface="paybooc OTF" pitchFamily="34" charset="0"/>
-                <a:ea typeface="paybooc OTF" pitchFamily="34" charset="-122"/>
-                <a:cs typeface="paybooc OTF" pitchFamily="34" charset="-120"/>
+                <a:latin typeface="Pretendard Light" pitchFamily="34" charset="0"/>
+                <a:ea typeface="Pretendard Light" pitchFamily="34" charset="-122"/>
+                <a:cs typeface="Pretendard Light" pitchFamily="34" charset="-120"/>
               </a:rPr>
               <a:t>RECAP · 1회차</a:t>
             </a:r>
@@ -23182,9 +23182,9 @@
                 <a:solidFill>
                   <a:srgbClr val="777169"/>
                 </a:solidFill>
-                <a:latin typeface="paybooc OTF" pitchFamily="34" charset="0"/>
-                <a:ea typeface="paybooc OTF" pitchFamily="34" charset="-122"/>
-                <a:cs typeface="paybooc OTF" pitchFamily="34" charset="-120"/>
+                <a:latin typeface="Pretendard Light" pitchFamily="34" charset="0"/>
+                <a:ea typeface="Pretendard Light" pitchFamily="34" charset="-122"/>
+                <a:cs typeface="Pretendard Light" pitchFamily="34" charset="-120"/>
               </a:rPr>
               <a:t>BRIDGE FROM SESSION 01</a:t>
             </a:r>
@@ -23258,9 +23258,9 @@
                 <a:solidFill>
                   <a:srgbClr val="777169"/>
                 </a:solidFill>
-                <a:latin typeface="paybooc OTF" pitchFamily="34" charset="0"/>
-                <a:ea typeface="paybooc OTF" pitchFamily="34" charset="-122"/>
-                <a:cs typeface="paybooc OTF" pitchFamily="34" charset="-120"/>
+                <a:latin typeface="Pretendard Light" pitchFamily="34" charset="0"/>
+                <a:ea typeface="Pretendard Light" pitchFamily="34" charset="-122"/>
+                <a:cs typeface="Pretendard Light" pitchFamily="34" charset="-120"/>
               </a:rPr>
               <a:t>운을 읽으려면 먼저 내 “차”를 알아야 한다</a:t>
             </a:r>
@@ -23330,9 +23330,9 @@
                 <a:solidFill>
                   <a:srgbClr val="777169"/>
                 </a:solidFill>
-                <a:latin typeface="paybooc OTF" pitchFamily="34" charset="0"/>
-                <a:ea typeface="paybooc OTF" pitchFamily="34" charset="-122"/>
-                <a:cs typeface="paybooc OTF" pitchFamily="34" charset="-120"/>
+                <a:latin typeface="Pretendard Light" pitchFamily="34" charset="0"/>
+                <a:ea typeface="Pretendard Light" pitchFamily="34" charset="-122"/>
+                <a:cs typeface="Pretendard Light" pitchFamily="34" charset="-120"/>
               </a:rPr>
               <a:t>ORIGIN</a:t>
             </a:r>
@@ -23368,9 +23368,9 @@
                 <a:solidFill>
                   <a:srgbClr val="0C0A09"/>
                 </a:solidFill>
-                <a:latin typeface="paybooc OTF" pitchFamily="34" charset="0"/>
-                <a:ea typeface="paybooc OTF" pitchFamily="34" charset="-122"/>
-                <a:cs typeface="paybooc OTF" pitchFamily="34" charset="-120"/>
+                <a:latin typeface="Pretendard Light" pitchFamily="34" charset="0"/>
+                <a:ea typeface="Pretendard Light" pitchFamily="34" charset="-122"/>
+                <a:cs typeface="Pretendard Light" pitchFamily="34" charset="-120"/>
               </a:rPr>
               <a:t>여덟 글자(팔자)</a:t>
             </a:r>
@@ -23481,9 +23481,9 @@
                 <a:solidFill>
                   <a:srgbClr val="777169"/>
                 </a:solidFill>
-                <a:latin typeface="paybooc OTF" pitchFamily="34" charset="0"/>
-                <a:ea typeface="paybooc OTF" pitchFamily="34" charset="-122"/>
-                <a:cs typeface="paybooc OTF" pitchFamily="34" charset="-120"/>
+                <a:latin typeface="Pretendard Light" pitchFamily="34" charset="0"/>
+                <a:ea typeface="Pretendard Light" pitchFamily="34" charset="-122"/>
+                <a:cs typeface="Pretendard Light" pitchFamily="34" charset="-120"/>
               </a:rPr>
               <a:t>BALANCE</a:t>
             </a:r>
@@ -23519,9 +23519,9 @@
                 <a:solidFill>
                   <a:srgbClr val="0C0A09"/>
                 </a:solidFill>
-                <a:latin typeface="paybooc OTF" pitchFamily="34" charset="0"/>
-                <a:ea typeface="paybooc OTF" pitchFamily="34" charset="-122"/>
-                <a:cs typeface="paybooc OTF" pitchFamily="34" charset="-120"/>
+                <a:latin typeface="Pretendard Light" pitchFamily="34" charset="0"/>
+                <a:ea typeface="Pretendard Light" pitchFamily="34" charset="-122"/>
+                <a:cs typeface="Pretendard Light" pitchFamily="34" charset="-120"/>
               </a:rPr>
               <a:t>오행의 균형</a:t>
             </a:r>
@@ -23632,9 +23632,9 @@
                 <a:solidFill>
                   <a:srgbClr val="777169"/>
                 </a:solidFill>
-                <a:latin typeface="paybooc OTF" pitchFamily="34" charset="0"/>
-                <a:ea typeface="paybooc OTF" pitchFamily="34" charset="-122"/>
-                <a:cs typeface="paybooc OTF" pitchFamily="34" charset="-120"/>
+                <a:latin typeface="Pretendard Light" pitchFamily="34" charset="0"/>
+                <a:ea typeface="Pretendard Light" pitchFamily="34" charset="-122"/>
+                <a:cs typeface="Pretendard Light" pitchFamily="34" charset="-120"/>
               </a:rPr>
               <a:t>ME</a:t>
             </a:r>
@@ -23670,9 +23670,9 @@
                 <a:solidFill>
                   <a:srgbClr val="0C0A09"/>
                 </a:solidFill>
-                <a:latin typeface="paybooc OTF" pitchFamily="34" charset="0"/>
-                <a:ea typeface="paybooc OTF" pitchFamily="34" charset="-122"/>
-                <a:cs typeface="paybooc OTF" pitchFamily="34" charset="-120"/>
+                <a:latin typeface="Pretendard Light" pitchFamily="34" charset="0"/>
+                <a:ea typeface="Pretendard Light" pitchFamily="34" charset="-122"/>
+                <a:cs typeface="Pretendard Light" pitchFamily="34" charset="-120"/>
               </a:rPr>
               <a:t>일간(日干) = 나</a:t>
             </a:r>
@@ -23783,9 +23783,9 @@
                 <a:solidFill>
                   <a:srgbClr val="777169"/>
                 </a:solidFill>
-                <a:latin typeface="paybooc OTF" pitchFamily="34" charset="0"/>
-                <a:ea typeface="paybooc OTF" pitchFamily="34" charset="-122"/>
-                <a:cs typeface="paybooc OTF" pitchFamily="34" charset="-120"/>
+                <a:latin typeface="Pretendard Light" pitchFamily="34" charset="0"/>
+                <a:ea typeface="Pretendard Light" pitchFamily="34" charset="-122"/>
+                <a:cs typeface="Pretendard Light" pitchFamily="34" charset="-120"/>
               </a:rPr>
               <a:t>연결</a:t>
             </a:r>
@@ -24038,9 +24038,9 @@
                 <a:solidFill>
                   <a:srgbClr val="0C0A09"/>
                 </a:solidFill>
-                <a:latin typeface="paybooc OTF" pitchFamily="34" charset="0"/>
-                <a:ea typeface="paybooc OTF" pitchFamily="34" charset="-122"/>
-                <a:cs typeface="paybooc OTF" pitchFamily="34" charset="-120"/>
+                <a:latin typeface="Pretendard Light" pitchFamily="34" charset="0"/>
+                <a:ea typeface="Pretendard Light" pitchFamily="34" charset="-122"/>
+                <a:cs typeface="Pretendard Light" pitchFamily="34" charset="-120"/>
               </a:rPr>
               <a:t>수수 사주교육</a:t>
             </a:r>
@@ -24076,9 +24076,9 @@
                 <a:solidFill>
                   <a:srgbClr val="777169"/>
                 </a:solidFill>
-                <a:latin typeface="paybooc OTF" pitchFamily="34" charset="0"/>
-                <a:ea typeface="paybooc OTF" pitchFamily="34" charset="-122"/>
-                <a:cs typeface="paybooc OTF" pitchFamily="34" charset="-120"/>
+                <a:latin typeface="Pretendard Light" pitchFamily="34" charset="0"/>
+                <a:ea typeface="Pretendard Light" pitchFamily="34" charset="-122"/>
+                <a:cs typeface="Pretendard Light" pitchFamily="34" charset="-120"/>
               </a:rPr>
               <a:t>SECTION 01</a:t>
             </a:r>
@@ -24114,9 +24114,9 @@
                 <a:solidFill>
                   <a:srgbClr val="777169"/>
                 </a:solidFill>
-                <a:latin typeface="paybooc OTF" pitchFamily="34" charset="0"/>
-                <a:ea typeface="paybooc OTF" pitchFamily="34" charset="-122"/>
-                <a:cs typeface="paybooc OTF" pitchFamily="34" charset="-120"/>
+                <a:latin typeface="Pretendard Light" pitchFamily="34" charset="0"/>
+                <a:ea typeface="Pretendard Light" pitchFamily="34" charset="-122"/>
+                <a:cs typeface="Pretendard Light" pitchFamily="34" charset="-120"/>
               </a:rPr>
               <a:t>SECTION 01</a:t>
             </a:r>
@@ -24190,9 +24190,9 @@
                 <a:solidFill>
                   <a:srgbClr val="A8A29E"/>
                 </a:solidFill>
-                <a:latin typeface="paybooc OTF" pitchFamily="34" charset="0"/>
-                <a:ea typeface="paybooc OTF" pitchFamily="34" charset="-122"/>
-                <a:cs typeface="paybooc OTF" pitchFamily="34" charset="-120"/>
+                <a:latin typeface="Pretendard Light" pitchFamily="34" charset="0"/>
+                <a:ea typeface="Pretendard Light" pitchFamily="34" charset="-122"/>
+                <a:cs typeface="Pretendard Light" pitchFamily="34" charset="-120"/>
               </a:rPr>
               <a:t>FIXED CHART vs FLOWING LUCK</a:t>
             </a:r>
@@ -24445,9 +24445,9 @@
                 <a:solidFill>
                   <a:srgbClr val="0C0A09"/>
                 </a:solidFill>
-                <a:latin typeface="paybooc OTF" pitchFamily="34" charset="0"/>
-                <a:ea typeface="paybooc OTF" pitchFamily="34" charset="-122"/>
-                <a:cs typeface="paybooc OTF" pitchFamily="34" charset="-120"/>
+                <a:latin typeface="Pretendard Light" pitchFamily="34" charset="0"/>
+                <a:ea typeface="Pretendard Light" pitchFamily="34" charset="-122"/>
+                <a:cs typeface="Pretendard Light" pitchFamily="34" charset="-120"/>
               </a:rPr>
               <a:t>수수 사주교육</a:t>
             </a:r>
@@ -24483,9 +24483,9 @@
                 <a:solidFill>
                   <a:srgbClr val="777169"/>
                 </a:solidFill>
-                <a:latin typeface="paybooc OTF" pitchFamily="34" charset="0"/>
-                <a:ea typeface="paybooc OTF" pitchFamily="34" charset="-122"/>
-                <a:cs typeface="paybooc OTF" pitchFamily="34" charset="-120"/>
+                <a:latin typeface="Pretendard Light" pitchFamily="34" charset="0"/>
+                <a:ea typeface="Pretendard Light" pitchFamily="34" charset="-122"/>
+                <a:cs typeface="Pretendard Light" pitchFamily="34" charset="-120"/>
               </a:rPr>
               <a:t>01</a:t>
             </a:r>
@@ -24521,9 +24521,9 @@
                 <a:solidFill>
                   <a:srgbClr val="777169"/>
                 </a:solidFill>
-                <a:latin typeface="paybooc OTF" pitchFamily="34" charset="0"/>
-                <a:ea typeface="paybooc OTF" pitchFamily="34" charset="-122"/>
-                <a:cs typeface="paybooc OTF" pitchFamily="34" charset="-120"/>
+                <a:latin typeface="Pretendard Light" pitchFamily="34" charset="0"/>
+                <a:ea typeface="Pretendard Light" pitchFamily="34" charset="-122"/>
+                <a:cs typeface="Pretendard Light" pitchFamily="34" charset="-120"/>
               </a:rPr>
               <a:t>01 · 사주와 운의 관계</a:t>
             </a:r>
@@ -24597,9 +24597,9 @@
                 <a:solidFill>
                   <a:srgbClr val="777169"/>
                 </a:solidFill>
-                <a:latin typeface="paybooc OTF" pitchFamily="34" charset="0"/>
-                <a:ea typeface="paybooc OTF" pitchFamily="34" charset="-122"/>
-                <a:cs typeface="paybooc OTF" pitchFamily="34" charset="-120"/>
+                <a:latin typeface="Pretendard Light" pitchFamily="34" charset="0"/>
+                <a:ea typeface="Pretendard Light" pitchFamily="34" charset="-122"/>
+                <a:cs typeface="Pretendard Light" pitchFamily="34" charset="-120"/>
               </a:rPr>
               <a:t>타고난 것과 흘러오는 것</a:t>
             </a:r>
@@ -24691,9 +24691,9 @@
                 <a:solidFill>
                   <a:srgbClr val="777169"/>
                 </a:solidFill>
-                <a:latin typeface="paybooc OTF" pitchFamily="34" charset="0"/>
-                <a:ea typeface="paybooc OTF" pitchFamily="34" charset="-122"/>
-                <a:cs typeface="paybooc OTF" pitchFamily="34" charset="-120"/>
+                <a:latin typeface="Pretendard Light" pitchFamily="34" charset="0"/>
+                <a:ea typeface="Pretendard Light" pitchFamily="34" charset="-122"/>
+                <a:cs typeface="Pretendard Light" pitchFamily="34" charset="-120"/>
               </a:rPr>
               <a:t>ORIGIN · 원국</a:t>
             </a:r>
@@ -24729,9 +24729,9 @@
                 <a:solidFill>
                   <a:srgbClr val="0C0A09"/>
                 </a:solidFill>
-                <a:latin typeface="paybooc OTF" pitchFamily="34" charset="0"/>
-                <a:ea typeface="paybooc OTF" pitchFamily="34" charset="-122"/>
-                <a:cs typeface="paybooc OTF" pitchFamily="34" charset="-120"/>
+                <a:latin typeface="Pretendard Light" pitchFamily="34" charset="0"/>
+                <a:ea typeface="Pretendard Light" pitchFamily="34" charset="-122"/>
+                <a:cs typeface="Pretendard Light" pitchFamily="34" charset="-120"/>
               </a:rPr>
               <a:t>바뀌지 않는 나</a:t>
             </a:r>
@@ -24925,9 +24925,9 @@
                 <a:solidFill>
                   <a:srgbClr val="777169"/>
                 </a:solidFill>
-                <a:latin typeface="paybooc OTF" pitchFamily="34" charset="0"/>
-                <a:ea typeface="paybooc OTF" pitchFamily="34" charset="-122"/>
-                <a:cs typeface="paybooc OTF" pitchFamily="34" charset="-120"/>
+                <a:latin typeface="Pretendard Light" pitchFamily="34" charset="0"/>
+                <a:ea typeface="Pretendard Light" pitchFamily="34" charset="-122"/>
+                <a:cs typeface="Pretendard Light" pitchFamily="34" charset="-120"/>
               </a:rPr>
               <a:t>LUCK · 운</a:t>
             </a:r>
@@ -24963,9 +24963,9 @@
                 <a:solidFill>
                   <a:srgbClr val="0C0A09"/>
                 </a:solidFill>
-                <a:latin typeface="paybooc OTF" pitchFamily="34" charset="0"/>
-                <a:ea typeface="paybooc OTF" pitchFamily="34" charset="-122"/>
-                <a:cs typeface="paybooc OTF" pitchFamily="34" charset="-120"/>
+                <a:latin typeface="Pretendard Light" pitchFamily="34" charset="0"/>
+                <a:ea typeface="Pretendard Light" pitchFamily="34" charset="-122"/>
+                <a:cs typeface="Pretendard Light" pitchFamily="34" charset="-120"/>
               </a:rPr>
               <a:t>흘러가는 환경</a:t>
             </a:r>
@@ -25257,9 +25257,9 @@
                 <a:solidFill>
                   <a:srgbClr val="0C0A09"/>
                 </a:solidFill>
-                <a:latin typeface="paybooc OTF" pitchFamily="34" charset="0"/>
-                <a:ea typeface="paybooc OTF" pitchFamily="34" charset="-122"/>
-                <a:cs typeface="paybooc OTF" pitchFamily="34" charset="-120"/>
+                <a:latin typeface="Pretendard Light" pitchFamily="34" charset="0"/>
+                <a:ea typeface="Pretendard Light" pitchFamily="34" charset="-122"/>
+                <a:cs typeface="Pretendard Light" pitchFamily="34" charset="-120"/>
               </a:rPr>
               <a:t>수수 사주교육</a:t>
             </a:r>
@@ -25295,9 +25295,9 @@
                 <a:solidFill>
                   <a:srgbClr val="777169"/>
                 </a:solidFill>
-                <a:latin typeface="paybooc OTF" pitchFamily="34" charset="0"/>
-                <a:ea typeface="paybooc OTF" pitchFamily="34" charset="-122"/>
-                <a:cs typeface="paybooc OTF" pitchFamily="34" charset="-120"/>
+                <a:latin typeface="Pretendard Light" pitchFamily="34" charset="0"/>
+                <a:ea typeface="Pretendard Light" pitchFamily="34" charset="-122"/>
+                <a:cs typeface="Pretendard Light" pitchFamily="34" charset="-120"/>
               </a:rPr>
               <a:t>01</a:t>
             </a:r>
@@ -25333,9 +25333,9 @@
                 <a:solidFill>
                   <a:srgbClr val="777169"/>
                 </a:solidFill>
-                <a:latin typeface="paybooc OTF" pitchFamily="34" charset="0"/>
-                <a:ea typeface="paybooc OTF" pitchFamily="34" charset="-122"/>
-                <a:cs typeface="paybooc OTF" pitchFamily="34" charset="-120"/>
+                <a:latin typeface="Pretendard Light" pitchFamily="34" charset="0"/>
+                <a:ea typeface="Pretendard Light" pitchFamily="34" charset="-122"/>
+                <a:cs typeface="Pretendard Light" pitchFamily="34" charset="-120"/>
               </a:rPr>
               <a:t>01 · 사주와 운의 관계</a:t>
             </a:r>
@@ -25409,9 +25409,9 @@
                 <a:solidFill>
                   <a:srgbClr val="777169"/>
                 </a:solidFill>
-                <a:latin typeface="paybooc OTF" pitchFamily="34" charset="0"/>
-                <a:ea typeface="paybooc OTF" pitchFamily="34" charset="-122"/>
-                <a:cs typeface="paybooc OTF" pitchFamily="34" charset="-120"/>
+                <a:latin typeface="Pretendard Light" pitchFamily="34" charset="0"/>
+                <a:ea typeface="Pretendard Light" pitchFamily="34" charset="-122"/>
+                <a:cs typeface="Pretendard Light" pitchFamily="34" charset="-120"/>
               </a:rPr>
               <a:t>같은 차라도 길이 다르면 결과가 다르다</a:t>
             </a:r>
@@ -25541,9 +25541,9 @@
                 <a:solidFill>
                   <a:srgbClr val="0C0A09"/>
                 </a:solidFill>
-                <a:latin typeface="paybooc OTF" pitchFamily="34" charset="0"/>
-                <a:ea typeface="paybooc OTF" pitchFamily="34" charset="-122"/>
-                <a:cs typeface="paybooc OTF" pitchFamily="34" charset="-120"/>
+                <a:latin typeface="Pretendard Light" pitchFamily="34" charset="0"/>
+                <a:ea typeface="Pretendard Light" pitchFamily="34" charset="-122"/>
+                <a:cs typeface="Pretendard Light" pitchFamily="34" charset="-120"/>
               </a:rPr>
               <a:t>사주 = 자동차</a:t>
             </a:r>
@@ -25752,9 +25752,9 @@
                 <a:solidFill>
                   <a:srgbClr val="0C0A09"/>
                 </a:solidFill>
-                <a:latin typeface="paybooc OTF" pitchFamily="34" charset="0"/>
-                <a:ea typeface="paybooc OTF" pitchFamily="34" charset="-122"/>
-                <a:cs typeface="paybooc OTF" pitchFamily="34" charset="-120"/>
+                <a:latin typeface="Pretendard Light" pitchFamily="34" charset="0"/>
+                <a:ea typeface="Pretendard Light" pitchFamily="34" charset="-122"/>
+                <a:cs typeface="Pretendard Light" pitchFamily="34" charset="-120"/>
               </a:rPr>
               <a:t>운 = 도로</a:t>
             </a:r>
@@ -25903,9 +25903,9 @@
                 <a:solidFill>
                   <a:srgbClr val="777169"/>
                 </a:solidFill>
-                <a:latin typeface="paybooc OTF" pitchFamily="34" charset="0"/>
-                <a:ea typeface="paybooc OTF" pitchFamily="34" charset="-122"/>
-                <a:cs typeface="paybooc OTF" pitchFamily="34" charset="-120"/>
+                <a:latin typeface="Pretendard Light" pitchFamily="34" charset="0"/>
+                <a:ea typeface="Pretendard Light" pitchFamily="34" charset="-122"/>
+                <a:cs typeface="Pretendard Light" pitchFamily="34" charset="-120"/>
               </a:rPr>
               <a:t>핵심</a:t>
             </a:r>
@@ -26155,9 +26155,9 @@
                 <a:solidFill>
                   <a:srgbClr val="0C0A09"/>
                 </a:solidFill>
-                <a:latin typeface="paybooc OTF" pitchFamily="34" charset="0"/>
-                <a:ea typeface="paybooc OTF" pitchFamily="34" charset="-122"/>
-                <a:cs typeface="paybooc OTF" pitchFamily="34" charset="-120"/>
+                <a:latin typeface="Pretendard Light" pitchFamily="34" charset="0"/>
+                <a:ea typeface="Pretendard Light" pitchFamily="34" charset="-122"/>
+                <a:cs typeface="Pretendard Light" pitchFamily="34" charset="-120"/>
               </a:rPr>
               <a:t>수수 사주교육</a:t>
             </a:r>
@@ -26193,9 +26193,9 @@
                 <a:solidFill>
                   <a:srgbClr val="777169"/>
                 </a:solidFill>
-                <a:latin typeface="paybooc OTF" pitchFamily="34" charset="0"/>
-                <a:ea typeface="paybooc OTF" pitchFamily="34" charset="-122"/>
-                <a:cs typeface="paybooc OTF" pitchFamily="34" charset="-120"/>
+                <a:latin typeface="Pretendard Light" pitchFamily="34" charset="0"/>
+                <a:ea typeface="Pretendard Light" pitchFamily="34" charset="-122"/>
+                <a:cs typeface="Pretendard Light" pitchFamily="34" charset="-120"/>
               </a:rPr>
               <a:t>01</a:t>
             </a:r>
@@ -26231,9 +26231,9 @@
                 <a:solidFill>
                   <a:srgbClr val="777169"/>
                 </a:solidFill>
-                <a:latin typeface="paybooc OTF" pitchFamily="34" charset="0"/>
-                <a:ea typeface="paybooc OTF" pitchFamily="34" charset="-122"/>
-                <a:cs typeface="paybooc OTF" pitchFamily="34" charset="-120"/>
+                <a:latin typeface="Pretendard Light" pitchFamily="34" charset="0"/>
+                <a:ea typeface="Pretendard Light" pitchFamily="34" charset="-122"/>
+                <a:cs typeface="Pretendard Light" pitchFamily="34" charset="-120"/>
               </a:rPr>
               <a:t>01 · 사주와 운의 관계</a:t>
             </a:r>
@@ -26307,9 +26307,9 @@
                 <a:solidFill>
                   <a:srgbClr val="777169"/>
                 </a:solidFill>
-                <a:latin typeface="paybooc OTF" pitchFamily="34" charset="0"/>
-                <a:ea typeface="paybooc OTF" pitchFamily="34" charset="-122"/>
-                <a:cs typeface="paybooc OTF" pitchFamily="34" charset="-120"/>
+                <a:latin typeface="Pretendard Light" pitchFamily="34" charset="0"/>
+                <a:ea typeface="Pretendard Light" pitchFamily="34" charset="-122"/>
+                <a:cs typeface="Pretendard Light" pitchFamily="34" charset="-120"/>
               </a:rPr>
               <a:t>좋은 차도 빙판길에선 미끄러진다</a:t>
             </a:r>
@@ -26439,9 +26439,9 @@
                 <a:solidFill>
                   <a:srgbClr val="0C0A09"/>
                 </a:solidFill>
-                <a:latin typeface="paybooc OTF" pitchFamily="34" charset="0"/>
-                <a:ea typeface="paybooc OTF" pitchFamily="34" charset="-122"/>
-                <a:cs typeface="paybooc OTF" pitchFamily="34" charset="-120"/>
+                <a:latin typeface="Pretendard Light" pitchFamily="34" charset="0"/>
+                <a:ea typeface="Pretendard Light" pitchFamily="34" charset="-122"/>
+                <a:cs typeface="Pretendard Light" pitchFamily="34" charset="-120"/>
               </a:rPr>
               <a:t>좋은 차 + 빙판길</a:t>
             </a:r>
@@ -26653,9 +26653,9 @@
                 <a:solidFill>
                   <a:srgbClr val="0C0A09"/>
                 </a:solidFill>
-                <a:latin typeface="paybooc OTF" pitchFamily="34" charset="0"/>
-                <a:ea typeface="paybooc OTF" pitchFamily="34" charset="-122"/>
-                <a:cs typeface="paybooc OTF" pitchFamily="34" charset="-120"/>
+                <a:latin typeface="Pretendard Light" pitchFamily="34" charset="0"/>
+                <a:ea typeface="Pretendard Light" pitchFamily="34" charset="-122"/>
+                <a:cs typeface="Pretendard Light" pitchFamily="34" charset="-120"/>
               </a:rPr>
               <a:t>낡은 차 + 고속도로</a:t>
             </a:r>
@@ -26807,9 +26807,9 @@
                 <a:solidFill>
                   <a:srgbClr val="777169"/>
                 </a:solidFill>
-                <a:latin typeface="paybooc OTF" pitchFamily="34" charset="0"/>
-                <a:ea typeface="paybooc OTF" pitchFamily="34" charset="-122"/>
-                <a:cs typeface="paybooc OTF" pitchFamily="34" charset="-120"/>
+                <a:latin typeface="Pretendard Light" pitchFamily="34" charset="0"/>
+                <a:ea typeface="Pretendard Light" pitchFamily="34" charset="-122"/>
+                <a:cs typeface="Pretendard Light" pitchFamily="34" charset="-120"/>
               </a:rPr>
               <a:t>그래서</a:t>
             </a:r>
@@ -27059,9 +27059,9 @@
                 <a:solidFill>
                   <a:srgbClr val="0C0A09"/>
                 </a:solidFill>
-                <a:latin typeface="paybooc OTF" pitchFamily="34" charset="0"/>
-                <a:ea typeface="paybooc OTF" pitchFamily="34" charset="-122"/>
-                <a:cs typeface="paybooc OTF" pitchFamily="34" charset="-120"/>
+                <a:latin typeface="Pretendard Light" pitchFamily="34" charset="0"/>
+                <a:ea typeface="Pretendard Light" pitchFamily="34" charset="-122"/>
+                <a:cs typeface="Pretendard Light" pitchFamily="34" charset="-120"/>
               </a:rPr>
               <a:t>수수 사주교육</a:t>
             </a:r>
@@ -27097,9 +27097,9 @@
                 <a:solidFill>
                   <a:srgbClr val="777169"/>
                 </a:solidFill>
-                <a:latin typeface="paybooc OTF" pitchFamily="34" charset="0"/>
-                <a:ea typeface="paybooc OTF" pitchFamily="34" charset="-122"/>
-                <a:cs typeface="paybooc OTF" pitchFamily="34" charset="-120"/>
+                <a:latin typeface="Pretendard Light" pitchFamily="34" charset="0"/>
+                <a:ea typeface="Pretendard Light" pitchFamily="34" charset="-122"/>
+                <a:cs typeface="Pretendard Light" pitchFamily="34" charset="-120"/>
               </a:rPr>
               <a:t>01</a:t>
             </a:r>
@@ -27135,9 +27135,9 @@
                 <a:solidFill>
                   <a:srgbClr val="777169"/>
                 </a:solidFill>
-                <a:latin typeface="paybooc OTF" pitchFamily="34" charset="0"/>
-                <a:ea typeface="paybooc OTF" pitchFamily="34" charset="-122"/>
-                <a:cs typeface="paybooc OTF" pitchFamily="34" charset="-120"/>
+                <a:latin typeface="Pretendard Light" pitchFamily="34" charset="0"/>
+                <a:ea typeface="Pretendard Light" pitchFamily="34" charset="-122"/>
+                <a:cs typeface="Pretendard Light" pitchFamily="34" charset="-120"/>
               </a:rPr>
               <a:t>01 · 사주와 운의 관계</a:t>
             </a:r>
@@ -27211,9 +27211,9 @@
                 <a:solidFill>
                   <a:srgbClr val="777169"/>
                 </a:solidFill>
-                <a:latin typeface="paybooc OTF" pitchFamily="34" charset="0"/>
-                <a:ea typeface="paybooc OTF" pitchFamily="34" charset="-122"/>
-                <a:cs typeface="paybooc OTF" pitchFamily="34" charset="-120"/>
+                <a:latin typeface="Pretendard Light" pitchFamily="34" charset="0"/>
+                <a:ea typeface="Pretendard Light" pitchFamily="34" charset="-122"/>
+                <a:cs typeface="Pretendard Light" pitchFamily="34" charset="-120"/>
               </a:rPr>
               <a:t>원국 위에 대운, 그 위에 세운</a:t>
             </a:r>
@@ -27283,9 +27283,9 @@
                 <a:solidFill>
                   <a:srgbClr val="777169"/>
                 </a:solidFill>
-                <a:latin typeface="paybooc OTF" pitchFamily="34" charset="0"/>
-                <a:ea typeface="paybooc OTF" pitchFamily="34" charset="-122"/>
-                <a:cs typeface="paybooc OTF" pitchFamily="34" charset="-120"/>
+                <a:latin typeface="Pretendard Light" pitchFamily="34" charset="0"/>
+                <a:ea typeface="Pretendard Light" pitchFamily="34" charset="-122"/>
+                <a:cs typeface="Pretendard Light" pitchFamily="34" charset="-120"/>
               </a:rPr>
               <a:t>평생 고정</a:t>
             </a:r>
@@ -27400,9 +27400,9 @@
                 <a:solidFill>
                   <a:srgbClr val="A8A29E"/>
                 </a:solidFill>
-                <a:latin typeface="paybooc OTF" pitchFamily="34" charset="0"/>
-                <a:ea typeface="paybooc OTF" pitchFamily="34" charset="-122"/>
-                <a:cs typeface="paybooc OTF" pitchFamily="34" charset="-120"/>
+                <a:latin typeface="Pretendard Light" pitchFamily="34" charset="0"/>
+                <a:ea typeface="Pretendard Light" pitchFamily="34" charset="-122"/>
+                <a:cs typeface="Pretendard Light" pitchFamily="34" charset="-120"/>
               </a:rPr>
               <a:t>→</a:t>
             </a:r>
@@ -27472,9 +27472,9 @@
                 <a:solidFill>
                   <a:srgbClr val="777169"/>
                 </a:solidFill>
-                <a:latin typeface="paybooc OTF" pitchFamily="34" charset="0"/>
-                <a:ea typeface="paybooc OTF" pitchFamily="34" charset="-122"/>
-                <a:cs typeface="paybooc OTF" pitchFamily="34" charset="-120"/>
+                <a:latin typeface="Pretendard Light" pitchFamily="34" charset="0"/>
+                <a:ea typeface="Pretendard Light" pitchFamily="34" charset="-122"/>
+                <a:cs typeface="Pretendard Light" pitchFamily="34" charset="-120"/>
               </a:rPr>
               <a:t>10년 단위</a:t>
             </a:r>
@@ -27589,9 +27589,9 @@
                 <a:solidFill>
                   <a:srgbClr val="A8A29E"/>
                 </a:solidFill>
-                <a:latin typeface="paybooc OTF" pitchFamily="34" charset="0"/>
-                <a:ea typeface="paybooc OTF" pitchFamily="34" charset="-122"/>
-                <a:cs typeface="paybooc OTF" pitchFamily="34" charset="-120"/>
+                <a:latin typeface="Pretendard Light" pitchFamily="34" charset="0"/>
+                <a:ea typeface="Pretendard Light" pitchFamily="34" charset="-122"/>
+                <a:cs typeface="Pretendard Light" pitchFamily="34" charset="-120"/>
               </a:rPr>
               <a:t>→</a:t>
             </a:r>
@@ -27661,9 +27661,9 @@
                 <a:solidFill>
                   <a:srgbClr val="777169"/>
                 </a:solidFill>
-                <a:latin typeface="paybooc OTF" pitchFamily="34" charset="0"/>
-                <a:ea typeface="paybooc OTF" pitchFamily="34" charset="-122"/>
-                <a:cs typeface="paybooc OTF" pitchFamily="34" charset="-120"/>
+                <a:latin typeface="Pretendard Light" pitchFamily="34" charset="0"/>
+                <a:ea typeface="Pretendard Light" pitchFamily="34" charset="-122"/>
+                <a:cs typeface="Pretendard Light" pitchFamily="34" charset="-120"/>
               </a:rPr>
               <a:t>1년 단위</a:t>
             </a:r>
@@ -27812,9 +27812,9 @@
                 <a:solidFill>
                   <a:srgbClr val="777169"/>
                 </a:solidFill>
-                <a:latin typeface="paybooc OTF" pitchFamily="34" charset="0"/>
-                <a:ea typeface="paybooc OTF" pitchFamily="34" charset="-122"/>
-                <a:cs typeface="paybooc OTF" pitchFamily="34" charset="-120"/>
+                <a:latin typeface="Pretendard Light" pitchFamily="34" charset="0"/>
+                <a:ea typeface="Pretendard Light" pitchFamily="34" charset="-122"/>
+                <a:cs typeface="Pretendard Light" pitchFamily="34" charset="-120"/>
               </a:rPr>
               <a:t>비유</a:t>
             </a:r>
